--- a/clients/align-hcm/deliverables/2026-08-12-bosley-hairclub-ukg-pro-merger-proposal/Align_HCM_Bosley_HairClub_UKG_Pro_Merger.pptx
+++ b/clients/align-hcm/deliverables/2026-08-12-bosley-hairclub-ukg-pro-merger-proposal/Align_HCM_Bosley_HairClub_UKG_Pro_Merger.pptx
@@ -3436,60 +3436,14 @@
       </p:sp>
       <p:sp>
         <p:nvSpPr>
-          <p:cNvPr id="11" name="ClientLogoPlate"/>
-          <p:cNvSpPr/>
-          <p:nvPr/>
-        </p:nvSpPr>
-        <p:spPr>
-          <a:xfrm>
-            <a:off x="8613648" y="2395728"/>
-            <a:ext cx="3127248" cy="2103120"/>
-          </a:xfrm>
-          <a:prstGeom prst="roundRect">
-            <a:avLst>
-              <a:gd name="adj" fmla="val 6956"/>
-            </a:avLst>
-          </a:prstGeom>
-          <a:solidFill>
-            <a:srgbClr val="FFFFFF"/>
-          </a:solidFill>
-          <a:ln>
-            <a:noFill/>
-          </a:ln>
-          <a:effectLst/>
-        </p:spPr>
-        <p:style>
-          <a:lnRef idx="1">
-            <a:schemeClr val="accent1"/>
-          </a:lnRef>
-          <a:fillRef idx="3">
-            <a:schemeClr val="accent1"/>
-          </a:fillRef>
-          <a:effectRef idx="2">
-            <a:schemeClr val="accent1"/>
-          </a:effectRef>
-          <a:fontRef idx="minor">
-            <a:schemeClr val="lt1"/>
-          </a:fontRef>
-        </p:style>
-        <p:txBody>
-          <a:bodyPr rtlCol="0" anchor="ctr"/>
-          <a:lstStyle/>
-          <a:p>
-            <a:pPr algn="ctr"/>
-          </a:p>
-        </p:txBody>
-      </p:sp>
-      <p:sp>
-        <p:nvSpPr>
-          <p:cNvPr id="12" name="CLIENT_LOGO_BOSLEY"/>
+          <p:cNvPr id="11" name="TextBox 10"/>
           <p:cNvSpPr txBox="1"/>
           <p:nvPr/>
         </p:nvSpPr>
         <p:spPr>
           <a:xfrm>
-            <a:off x="8613648" y="2798064"/>
-            <a:ext cx="3127248" cy="457200"/>
+            <a:off x="8138160" y="2761488"/>
+            <a:ext cx="4053809" cy="237744"/>
           </a:xfrm>
           <a:prstGeom prst="rect">
             <a:avLst/>
@@ -3504,17 +3458,41 @@
           <a:p>
             <a:pPr algn="ctr"/>
             <a:r>
-              <a:rPr sz="2700" b="1" i="0" spc="220">
+              <a:rPr sz="950" b="0" i="0" spc="160">
                 <a:solidFill>
-                  <a:srgbClr val="232E3E"/>
+                  <a:srgbClr val="8792A3"/>
                 </a:solidFill>
-                <a:latin typeface="Cambria"/>
+                <a:latin typeface="Calibri"/>
               </a:rPr>
-              <a:t>BOSLEY</a:t>
-            </a:r>
-          </a:p>
-        </p:txBody>
-      </p:sp>
+              <a:t>PREPARED FOR</a:t>
+            </a:r>
+          </a:p>
+        </p:txBody>
+      </p:sp>
+      <p:pic>
+        <p:nvPicPr>
+          <p:cNvPr id="12" name="BosleyHairClub_Logo" descr="bosley-hairclub-logo-white.png"/>
+          <p:cNvPicPr>
+            <a:picLocks noChangeAspect="1"/>
+          </p:cNvPicPr>
+          <p:nvPr/>
+        </p:nvPicPr>
+        <p:blipFill>
+          <a:blip r:embed="rId3"/>
+          <a:stretch>
+            <a:fillRect/>
+          </a:stretch>
+        </p:blipFill>
+        <p:spPr>
+          <a:xfrm>
+            <a:off x="8839184" y="3163824"/>
+            <a:ext cx="2651760" cy="912070"/>
+          </a:xfrm>
+          <a:prstGeom prst="rect">
+            <a:avLst/>
+          </a:prstGeom>
+        </p:spPr>
+      </p:pic>
       <p:sp>
         <p:nvSpPr>
           <p:cNvPr id="13" name="Rectangle 12"/>
@@ -3523,8 +3501,8 @@
         </p:nvSpPr>
         <p:spPr>
           <a:xfrm>
-            <a:off x="10076688" y="3383280"/>
-            <a:ext cx="201168" cy="32004"/>
+            <a:off x="9890744" y="4386918"/>
+            <a:ext cx="548640" cy="32004"/>
           </a:xfrm>
           <a:prstGeom prst="rect">
             <a:avLst/>
@@ -3561,77 +3539,7 @@
       </p:sp>
       <p:sp>
         <p:nvSpPr>
-          <p:cNvPr id="14" name="CLIENT_LOGO_HAIRCLUB"/>
-          <p:cNvSpPr txBox="1"/>
-          <p:nvPr/>
-        </p:nvSpPr>
-        <p:spPr>
-          <a:xfrm>
-            <a:off x="8613648" y="3584448"/>
-            <a:ext cx="3127248" cy="420624"/>
-          </a:xfrm>
-          <a:prstGeom prst="rect">
-            <a:avLst/>
-          </a:prstGeom>
-          <a:noFill/>
-        </p:spPr>
-        <p:txBody>
-          <a:bodyPr wrap="square" lIns="0" rIns="0" tIns="0" bIns="0">
-            <a:spAutoFit/>
-          </a:bodyPr>
-          <a:lstStyle/>
-          <a:p>
-            <a:pPr algn="ctr"/>
-            <a:r>
-              <a:rPr sz="2400" b="1" i="0">
-                <a:solidFill>
-                  <a:srgbClr val="232E3E"/>
-                </a:solidFill>
-                <a:latin typeface="Cambria"/>
-              </a:rPr>
-              <a:t>HairClub</a:t>
-            </a:r>
-          </a:p>
-        </p:txBody>
-      </p:sp>
-      <p:sp>
-        <p:nvSpPr>
-          <p:cNvPr id="15" name="TextBox 14"/>
-          <p:cNvSpPr txBox="1"/>
-          <p:nvPr/>
-        </p:nvSpPr>
-        <p:spPr>
-          <a:xfrm>
-            <a:off x="8613648" y="4681728"/>
-            <a:ext cx="3127248" cy="237744"/>
-          </a:xfrm>
-          <a:prstGeom prst="rect">
-            <a:avLst/>
-          </a:prstGeom>
-          <a:noFill/>
-        </p:spPr>
-        <p:txBody>
-          <a:bodyPr wrap="square" lIns="0" rIns="0" tIns="0" bIns="0">
-            <a:spAutoFit/>
-          </a:bodyPr>
-          <a:lstStyle/>
-          <a:p>
-            <a:pPr algn="ctr"/>
-            <a:r>
-              <a:rPr sz="950" b="0" i="0" spc="100">
-                <a:solidFill>
-                  <a:srgbClr val="8792A3"/>
-                </a:solidFill>
-                <a:latin typeface="Calibri"/>
-              </a:rPr>
-              <a:t>PREPARED FOR BOSLEY HAIRCLUB</a:t>
-            </a:r>
-          </a:p>
-        </p:txBody>
-      </p:sp>
-      <p:sp>
-        <p:nvSpPr>
-          <p:cNvPr id="16" name="TextBox 15"/>
+          <p:cNvPr id="14" name="TextBox 13"/>
           <p:cNvSpPr txBox="1"/>
           <p:nvPr/>
         </p:nvSpPr>
@@ -3666,7 +3574,7 @@
       </p:sp>
       <p:sp>
         <p:nvSpPr>
-          <p:cNvPr id="17" name="TextBox 16"/>
+          <p:cNvPr id="15" name="TextBox 14"/>
           <p:cNvSpPr txBox="1"/>
           <p:nvPr/>
         </p:nvSpPr>

--- a/clients/align-hcm/deliverables/2026-08-12-bosley-hairclub-ukg-pro-merger-proposal/Align_HCM_Bosley_HairClub_UKG_Pro_Merger.pptx
+++ b/clients/align-hcm/deliverables/2026-08-12-bosley-hairclub-ukg-pro-merger-proposal/Align_HCM_Bosley_HairClub_UKG_Pro_Merger.pptx
@@ -3831,15 +3831,15 @@
           </a:xfrm>
           <a:prstGeom prst="roundRect">
             <a:avLst>
-              <a:gd name="adj" fmla="val 6185"/>
+              <a:gd name="adj" fmla="val 6701"/>
             </a:avLst>
           </a:prstGeom>
           <a:solidFill>
-            <a:srgbClr val="F6F8FA"/>
+            <a:srgbClr val="232E3E"/>
           </a:solidFill>
-          <a:ln w="9525">
+          <a:ln w="15875">
             <a:solidFill>
-              <a:srgbClr val="DCE2E9"/>
+              <a:srgbClr val="4A5C75"/>
             </a:solidFill>
           </a:ln>
           <a:effectLst/>
@@ -3875,16 +3875,18 @@
         <p:spPr>
           <a:xfrm>
             <a:off x="1014983" y="2450591"/>
-            <a:ext cx="512064" cy="512064"/>
+            <a:ext cx="530352" cy="530352"/>
           </a:xfrm>
           <a:prstGeom prst="ellipse">
             <a:avLst/>
           </a:prstGeom>
           <a:solidFill>
-            <a:srgbClr val="232E3E"/>
+            <a:srgbClr val="2B3849"/>
           </a:solidFill>
-          <a:ln>
-            <a:noFill/>
+          <a:ln w="12700">
+            <a:solidFill>
+              <a:srgbClr val="4A5C75"/>
+            </a:solidFill>
           </a:ln>
           <a:effectLst/>
         </p:spPr>
@@ -3927,7 +3929,7 @@
         <p:spPr>
           <a:xfrm>
             <a:off x="1147572" y="2583179"/>
-            <a:ext cx="246888" cy="246888"/>
+            <a:ext cx="265176" cy="265176"/>
           </a:xfrm>
           <a:prstGeom prst="rect">
             <a:avLst/>
@@ -3942,8 +3944,8 @@
         </p:nvSpPr>
         <p:spPr>
           <a:xfrm>
-            <a:off x="1691640" y="2505456"/>
-            <a:ext cx="3919712" cy="420624"/>
+            <a:off x="1728216" y="2569463"/>
+            <a:ext cx="3883136" cy="420624"/>
           </a:xfrm>
           <a:prstGeom prst="rect">
             <a:avLst/>
@@ -3960,7 +3962,7 @@
             <a:r>
               <a:rPr sz="1350" b="1" i="0">
                 <a:solidFill>
-                  <a:srgbClr val="232E3E"/>
+                  <a:srgbClr val="FFFFFF"/>
                 </a:solidFill>
                 <a:latin typeface="Calibri"/>
               </a:rPr>
@@ -3977,8 +3979,8 @@
         </p:nvSpPr>
         <p:spPr>
           <a:xfrm>
-            <a:off x="1014983" y="3072384"/>
-            <a:ext cx="4596368" cy="640080"/>
+            <a:off x="1014983" y="3090672"/>
+            <a:ext cx="4596368" cy="621792"/>
           </a:xfrm>
           <a:prstGeom prst="rect">
             <a:avLst/>
@@ -3999,7 +4001,7 @@
             <a:r>
               <a:rPr sz="1100" b="0" i="0">
                 <a:solidFill>
-                  <a:srgbClr val="55606E"/>
+                  <a:srgbClr val="AEB9C8"/>
                 </a:solidFill>
                 <a:latin typeface="Calibri"/>
               </a:rPr>
@@ -4021,15 +4023,15 @@
           </a:xfrm>
           <a:prstGeom prst="roundRect">
             <a:avLst>
-              <a:gd name="adj" fmla="val 6185"/>
+              <a:gd name="adj" fmla="val 6701"/>
             </a:avLst>
           </a:prstGeom>
           <a:solidFill>
-            <a:srgbClr val="F6F8FA"/>
+            <a:srgbClr val="232E3E"/>
           </a:solidFill>
-          <a:ln w="9525">
+          <a:ln w="15875">
             <a:solidFill>
-              <a:srgbClr val="DCE2E9"/>
+              <a:srgbClr val="4A5C75"/>
             </a:solidFill>
           </a:ln>
           <a:effectLst/>
@@ -4065,16 +4067,18 @@
         <p:spPr>
           <a:xfrm>
             <a:off x="6580616" y="2450591"/>
-            <a:ext cx="512064" cy="512064"/>
+            <a:ext cx="530352" cy="530352"/>
           </a:xfrm>
           <a:prstGeom prst="ellipse">
             <a:avLst/>
           </a:prstGeom>
           <a:solidFill>
-            <a:srgbClr val="232E3E"/>
+            <a:srgbClr val="2B3849"/>
           </a:solidFill>
-          <a:ln>
-            <a:noFill/>
+          <a:ln w="12700">
+            <a:solidFill>
+              <a:srgbClr val="4A5C75"/>
+            </a:solidFill>
           </a:ln>
           <a:effectLst/>
         </p:spPr>
@@ -4117,7 +4121,7 @@
         <p:spPr>
           <a:xfrm>
             <a:off x="6713204" y="2583179"/>
-            <a:ext cx="246888" cy="246888"/>
+            <a:ext cx="265176" cy="265176"/>
           </a:xfrm>
           <a:prstGeom prst="rect">
             <a:avLst/>
@@ -4132,8 +4136,8 @@
         </p:nvSpPr>
         <p:spPr>
           <a:xfrm>
-            <a:off x="7257272" y="2505456"/>
-            <a:ext cx="3919712" cy="420624"/>
+            <a:off x="7293848" y="2569463"/>
+            <a:ext cx="3883136" cy="420624"/>
           </a:xfrm>
           <a:prstGeom prst="rect">
             <a:avLst/>
@@ -4150,7 +4154,7 @@
             <a:r>
               <a:rPr sz="1350" b="1" i="0">
                 <a:solidFill>
-                  <a:srgbClr val="232E3E"/>
+                  <a:srgbClr val="FFFFFF"/>
                 </a:solidFill>
                 <a:latin typeface="Calibri"/>
               </a:rPr>
@@ -4167,8 +4171,8 @@
         </p:nvSpPr>
         <p:spPr>
           <a:xfrm>
-            <a:off x="6580616" y="3072384"/>
-            <a:ext cx="4596368" cy="640080"/>
+            <a:off x="6580616" y="3090672"/>
+            <a:ext cx="4596368" cy="621792"/>
           </a:xfrm>
           <a:prstGeom prst="rect">
             <a:avLst/>
@@ -4189,7 +4193,7 @@
             <a:r>
               <a:rPr sz="1100" b="0" i="0">
                 <a:solidFill>
-                  <a:srgbClr val="55606E"/>
+                  <a:srgbClr val="AEB9C8"/>
                 </a:solidFill>
                 <a:latin typeface="Calibri"/>
               </a:rPr>
@@ -4211,15 +4215,15 @@
           </a:xfrm>
           <a:prstGeom prst="roundRect">
             <a:avLst>
-              <a:gd name="adj" fmla="val 6185"/>
+              <a:gd name="adj" fmla="val 6701"/>
             </a:avLst>
           </a:prstGeom>
           <a:solidFill>
-            <a:srgbClr val="F6F8FA"/>
+            <a:srgbClr val="232E3E"/>
           </a:solidFill>
-          <a:ln w="9525">
+          <a:ln w="15875">
             <a:solidFill>
-              <a:srgbClr val="DCE2E9"/>
+              <a:srgbClr val="4A5C75"/>
             </a:solidFill>
           </a:ln>
           <a:effectLst/>
@@ -4255,16 +4259,18 @@
         <p:spPr>
           <a:xfrm>
             <a:off x="1014983" y="4535423"/>
-            <a:ext cx="512064" cy="512064"/>
+            <a:ext cx="530352" cy="530352"/>
           </a:xfrm>
           <a:prstGeom prst="ellipse">
             <a:avLst/>
           </a:prstGeom>
           <a:solidFill>
-            <a:srgbClr val="232E3E"/>
+            <a:srgbClr val="2B3849"/>
           </a:solidFill>
-          <a:ln>
-            <a:noFill/>
+          <a:ln w="12700">
+            <a:solidFill>
+              <a:srgbClr val="4A5C75"/>
+            </a:solidFill>
           </a:ln>
           <a:effectLst/>
         </p:spPr>
@@ -4307,7 +4313,7 @@
         <p:spPr>
           <a:xfrm>
             <a:off x="1147572" y="4668011"/>
-            <a:ext cx="246888" cy="246888"/>
+            <a:ext cx="265176" cy="265176"/>
           </a:xfrm>
           <a:prstGeom prst="rect">
             <a:avLst/>
@@ -4322,8 +4328,8 @@
         </p:nvSpPr>
         <p:spPr>
           <a:xfrm>
-            <a:off x="1691640" y="4590288"/>
-            <a:ext cx="3919712" cy="420624"/>
+            <a:off x="1728216" y="4654295"/>
+            <a:ext cx="3883136" cy="420624"/>
           </a:xfrm>
           <a:prstGeom prst="rect">
             <a:avLst/>
@@ -4340,7 +4346,7 @@
             <a:r>
               <a:rPr sz="1350" b="1" i="0">
                 <a:solidFill>
-                  <a:srgbClr val="232E3E"/>
+                  <a:srgbClr val="FFFFFF"/>
                 </a:solidFill>
                 <a:latin typeface="Calibri"/>
               </a:rPr>
@@ -4357,8 +4363,8 @@
         </p:nvSpPr>
         <p:spPr>
           <a:xfrm>
-            <a:off x="1014983" y="5157215"/>
-            <a:ext cx="4596368" cy="640080"/>
+            <a:off x="1014983" y="5175503"/>
+            <a:ext cx="4596368" cy="621792"/>
           </a:xfrm>
           <a:prstGeom prst="rect">
             <a:avLst/>
@@ -4379,7 +4385,7 @@
             <a:r>
               <a:rPr sz="1100" b="0" i="0">
                 <a:solidFill>
-                  <a:srgbClr val="55606E"/>
+                  <a:srgbClr val="AEB9C8"/>
                 </a:solidFill>
                 <a:latin typeface="Calibri"/>
               </a:rPr>
@@ -4401,15 +4407,15 @@
           </a:xfrm>
           <a:prstGeom prst="roundRect">
             <a:avLst>
-              <a:gd name="adj" fmla="val 6185"/>
+              <a:gd name="adj" fmla="val 6701"/>
             </a:avLst>
           </a:prstGeom>
           <a:solidFill>
-            <a:srgbClr val="F6F8FA"/>
+            <a:srgbClr val="232E3E"/>
           </a:solidFill>
-          <a:ln w="9525">
+          <a:ln w="15875">
             <a:solidFill>
-              <a:srgbClr val="DCE2E9"/>
+              <a:srgbClr val="4A5C75"/>
             </a:solidFill>
           </a:ln>
           <a:effectLst/>
@@ -4445,16 +4451,18 @@
         <p:spPr>
           <a:xfrm>
             <a:off x="6580616" y="4535423"/>
-            <a:ext cx="512064" cy="512064"/>
+            <a:ext cx="530352" cy="530352"/>
           </a:xfrm>
           <a:prstGeom prst="ellipse">
             <a:avLst/>
           </a:prstGeom>
           <a:solidFill>
-            <a:srgbClr val="232E3E"/>
+            <a:srgbClr val="2B3849"/>
           </a:solidFill>
-          <a:ln>
-            <a:noFill/>
+          <a:ln w="12700">
+            <a:solidFill>
+              <a:srgbClr val="4A5C75"/>
+            </a:solidFill>
           </a:ln>
           <a:effectLst/>
         </p:spPr>
@@ -4497,7 +4505,7 @@
         <p:spPr>
           <a:xfrm>
             <a:off x="6713204" y="4668011"/>
-            <a:ext cx="246888" cy="246888"/>
+            <a:ext cx="265176" cy="265176"/>
           </a:xfrm>
           <a:prstGeom prst="rect">
             <a:avLst/>
@@ -4512,8 +4520,8 @@
         </p:nvSpPr>
         <p:spPr>
           <a:xfrm>
-            <a:off x="7257272" y="4590288"/>
-            <a:ext cx="3919712" cy="420624"/>
+            <a:off x="7293848" y="4654295"/>
+            <a:ext cx="3883136" cy="420624"/>
           </a:xfrm>
           <a:prstGeom prst="rect">
             <a:avLst/>
@@ -4530,7 +4538,7 @@
             <a:r>
               <a:rPr sz="1350" b="1" i="0">
                 <a:solidFill>
-                  <a:srgbClr val="232E3E"/>
+                  <a:srgbClr val="FFFFFF"/>
                 </a:solidFill>
                 <a:latin typeface="Calibri"/>
               </a:rPr>
@@ -4547,8 +4555,8 @@
         </p:nvSpPr>
         <p:spPr>
           <a:xfrm>
-            <a:off x="6580616" y="5157215"/>
-            <a:ext cx="4596368" cy="640080"/>
+            <a:off x="6580616" y="5175503"/>
+            <a:ext cx="4596368" cy="621792"/>
           </a:xfrm>
           <a:prstGeom prst="rect">
             <a:avLst/>
@@ -4569,7 +4577,7 @@
             <a:r>
               <a:rPr sz="1100" b="0" i="0">
                 <a:solidFill>
-                  <a:srgbClr val="55606E"/>
+                  <a:srgbClr val="AEB9C8"/>
                 </a:solidFill>
                 <a:latin typeface="Calibri"/>
               </a:rPr>
@@ -5881,7 +5889,7 @@
       </p:sp>
       <p:sp>
         <p:nvSpPr>
-          <p:cNvPr id="29" name="Rounded Rectangle 28"/>
+          <p:cNvPr id="29" name="TimelineNote"/>
           <p:cNvSpPr/>
           <p:nvPr/>
         </p:nvSpPr>
@@ -5892,15 +5900,15 @@
           </a:xfrm>
           <a:prstGeom prst="roundRect">
             <a:avLst>
-              <a:gd name="adj" fmla="val 10416"/>
+              <a:gd name="adj" fmla="val 13541"/>
             </a:avLst>
           </a:prstGeom>
           <a:solidFill>
-            <a:srgbClr val="F6F8FA"/>
+            <a:srgbClr val="232E3E"/>
           </a:solidFill>
-          <a:ln w="9525">
+          <a:ln w="15875">
             <a:solidFill>
-              <a:srgbClr val="DCE2E9"/>
+              <a:srgbClr val="4A5C75"/>
             </a:solidFill>
           </a:ln>
           <a:effectLst/>
@@ -5935,17 +5943,19 @@
         </p:nvSpPr>
         <p:spPr>
           <a:xfrm>
-            <a:off x="978408" y="5084064"/>
-            <a:ext cx="475488" cy="475488"/>
+            <a:off x="978408" y="5056632"/>
+            <a:ext cx="530352" cy="530352"/>
           </a:xfrm>
           <a:prstGeom prst="ellipse">
             <a:avLst/>
           </a:prstGeom>
           <a:solidFill>
-            <a:srgbClr val="232E3E"/>
+            <a:srgbClr val="2B3849"/>
           </a:solidFill>
-          <a:ln>
-            <a:noFill/>
+          <a:ln w="12700">
+            <a:solidFill>
+              <a:srgbClr val="4A5C75"/>
+            </a:solidFill>
           </a:ln>
           <a:effectLst/>
         </p:spPr>
@@ -5987,8 +5997,8 @@
         </p:blipFill>
         <p:spPr>
           <a:xfrm>
-            <a:off x="1101852" y="5207507"/>
-            <a:ext cx="228600" cy="228600"/>
+            <a:off x="1110996" y="5189220"/>
+            <a:ext cx="265176" cy="265176"/>
           </a:xfrm>
           <a:prstGeom prst="rect">
             <a:avLst/>
@@ -6003,8 +6013,8 @@
         </p:nvSpPr>
         <p:spPr>
           <a:xfrm>
-            <a:off x="1636776" y="5120640"/>
-            <a:ext cx="9558497" cy="457200"/>
+            <a:off x="1655064" y="5120640"/>
+            <a:ext cx="9540209" cy="457200"/>
           </a:xfrm>
           <a:prstGeom prst="rect">
             <a:avLst/>
@@ -6025,7 +6035,7 @@
             <a:r>
               <a:rPr sz="1150" b="0" i="0">
                 <a:solidFill>
-                  <a:srgbClr val="55606E"/>
+                  <a:srgbClr val="AEB9C8"/>
                 </a:solidFill>
                 <a:latin typeface="Calibri"/>
               </a:rPr>
@@ -6394,26 +6404,26 @@
                     </a:p>
                   </a:txBody>
                   <a:tcPr marL="82296" marR="82296" marT="50292" marB="50292" anchor="ctr">
-                    <a:lnB w="9525" cap="flat" cmpd="sng" algn="ctr">
+                    <a:lnL w="12700" cap="flat" cmpd="sng" algn="ctr">
                       <a:solidFill>
                         <a:srgbClr val="232E3E"/>
                       </a:solidFill>
+                    </a:lnL>
+                    <a:lnR w="12700" cap="flat" cmpd="sng" algn="ctr">
+                      <a:solidFill>
+                        <a:srgbClr val="232E3E"/>
+                      </a:solidFill>
+                    </a:lnR>
+                    <a:lnT w="12700" cap="flat" cmpd="sng" algn="ctr">
+                      <a:solidFill>
+                        <a:srgbClr val="232E3E"/>
+                      </a:solidFill>
+                    </a:lnT>
+                    <a:lnB w="12700" cap="flat" cmpd="sng" algn="ctr">
+                      <a:solidFill>
+                        <a:srgbClr val="232E3E"/>
+                      </a:solidFill>
                     </a:lnB>
-                    <a:lnT w="9525" cap="flat" cmpd="sng" algn="ctr">
-                      <a:solidFill>
-                        <a:srgbClr val="232E3E"/>
-                      </a:solidFill>
-                    </a:lnT>
-                    <a:lnR w="9525" cap="flat" cmpd="sng" algn="ctr">
-                      <a:solidFill>
-                        <a:srgbClr val="232E3E"/>
-                      </a:solidFill>
-                    </a:lnR>
-                    <a:lnL w="9525" cap="flat" cmpd="sng" algn="ctr">
-                      <a:solidFill>
-                        <a:srgbClr val="232E3E"/>
-                      </a:solidFill>
-                    </a:lnL>
                     <a:solidFill>
                       <a:srgbClr val="232E3E"/>
                     </a:solidFill>
@@ -6441,26 +6451,26 @@
                     </a:p>
                   </a:txBody>
                   <a:tcPr marL="82296" marR="82296" marT="50292" marB="50292" anchor="ctr">
-                    <a:lnB w="9525" cap="flat" cmpd="sng" algn="ctr">
+                    <a:lnL w="12700" cap="flat" cmpd="sng" algn="ctr">
                       <a:solidFill>
                         <a:srgbClr val="232E3E"/>
                       </a:solidFill>
+                    </a:lnL>
+                    <a:lnR w="12700" cap="flat" cmpd="sng" algn="ctr">
+                      <a:solidFill>
+                        <a:srgbClr val="232E3E"/>
+                      </a:solidFill>
+                    </a:lnR>
+                    <a:lnT w="12700" cap="flat" cmpd="sng" algn="ctr">
+                      <a:solidFill>
+                        <a:srgbClr val="232E3E"/>
+                      </a:solidFill>
+                    </a:lnT>
+                    <a:lnB w="12700" cap="flat" cmpd="sng" algn="ctr">
+                      <a:solidFill>
+                        <a:srgbClr val="232E3E"/>
+                      </a:solidFill>
                     </a:lnB>
-                    <a:lnT w="9525" cap="flat" cmpd="sng" algn="ctr">
-                      <a:solidFill>
-                        <a:srgbClr val="232E3E"/>
-                      </a:solidFill>
-                    </a:lnT>
-                    <a:lnR w="9525" cap="flat" cmpd="sng" algn="ctr">
-                      <a:solidFill>
-                        <a:srgbClr val="232E3E"/>
-                      </a:solidFill>
-                    </a:lnR>
-                    <a:lnL w="9525" cap="flat" cmpd="sng" algn="ctr">
-                      <a:solidFill>
-                        <a:srgbClr val="232E3E"/>
-                      </a:solidFill>
-                    </a:lnL>
                     <a:solidFill>
                       <a:srgbClr val="232E3E"/>
                     </a:solidFill>
@@ -6488,26 +6498,26 @@
                     </a:p>
                   </a:txBody>
                   <a:tcPr marL="82296" marR="82296" marT="50292" marB="50292" anchor="ctr">
-                    <a:lnB w="9525" cap="flat" cmpd="sng" algn="ctr">
+                    <a:lnL w="12700" cap="flat" cmpd="sng" algn="ctr">
                       <a:solidFill>
                         <a:srgbClr val="232E3E"/>
                       </a:solidFill>
+                    </a:lnL>
+                    <a:lnR w="12700" cap="flat" cmpd="sng" algn="ctr">
+                      <a:solidFill>
+                        <a:srgbClr val="232E3E"/>
+                      </a:solidFill>
+                    </a:lnR>
+                    <a:lnT w="12700" cap="flat" cmpd="sng" algn="ctr">
+                      <a:solidFill>
+                        <a:srgbClr val="232E3E"/>
+                      </a:solidFill>
+                    </a:lnT>
+                    <a:lnB w="12700" cap="flat" cmpd="sng" algn="ctr">
+                      <a:solidFill>
+                        <a:srgbClr val="232E3E"/>
+                      </a:solidFill>
                     </a:lnB>
-                    <a:lnT w="9525" cap="flat" cmpd="sng" algn="ctr">
-                      <a:solidFill>
-                        <a:srgbClr val="232E3E"/>
-                      </a:solidFill>
-                    </a:lnT>
-                    <a:lnR w="9525" cap="flat" cmpd="sng" algn="ctr">
-                      <a:solidFill>
-                        <a:srgbClr val="232E3E"/>
-                      </a:solidFill>
-                    </a:lnR>
-                    <a:lnL w="9525" cap="flat" cmpd="sng" algn="ctr">
-                      <a:solidFill>
-                        <a:srgbClr val="232E3E"/>
-                      </a:solidFill>
-                    </a:lnL>
                     <a:solidFill>
                       <a:srgbClr val="232E3E"/>
                     </a:solidFill>
@@ -6537,26 +6547,26 @@
                     </a:p>
                   </a:txBody>
                   <a:tcPr marL="82296" marR="82296" marT="50292" marB="50292" anchor="ctr">
-                    <a:lnR w="9525" cap="flat" cmpd="sng" algn="ctr">
-                      <a:solidFill>
-                        <a:srgbClr val="FFFFFF"/>
+                    <a:lnL w="12700" cap="flat" cmpd="sng" algn="ctr">
+                      <a:solidFill>
+                        <a:srgbClr val="C5CEDA"/>
+                      </a:solidFill>
+                    </a:lnL>
+                    <a:lnR w="12700" cap="flat" cmpd="sng" algn="ctr">
+                      <a:solidFill>
+                        <a:srgbClr val="E3E8EE"/>
                       </a:solidFill>
                     </a:lnR>
-                    <a:lnL w="9525" cap="flat" cmpd="sng" algn="ctr">
-                      <a:solidFill>
-                        <a:srgbClr val="FFFFFF"/>
-                      </a:solidFill>
-                    </a:lnL>
-                    <a:lnB w="9525" cap="flat" cmpd="sng" algn="ctr">
-                      <a:solidFill>
-                        <a:srgbClr val="DCE2E9"/>
+                    <a:lnT w="12700" cap="flat" cmpd="sng" algn="ctr">
+                      <a:solidFill>
+                        <a:srgbClr val="C5CEDA"/>
+                      </a:solidFill>
+                    </a:lnT>
+                    <a:lnB w="12700" cap="flat" cmpd="sng" algn="ctr">
+                      <a:solidFill>
+                        <a:srgbClr val="C5CEDA"/>
                       </a:solidFill>
                     </a:lnB>
-                    <a:lnT w="9525" cap="flat" cmpd="sng" algn="ctr">
-                      <a:solidFill>
-                        <a:srgbClr val="DCE2E9"/>
-                      </a:solidFill>
-                    </a:lnT>
                     <a:solidFill>
                       <a:srgbClr val="FFFFFF"/>
                     </a:solidFill>
@@ -6584,26 +6594,26 @@
                     </a:p>
                   </a:txBody>
                   <a:tcPr marL="82296" marR="82296" marT="50292" marB="50292" anchor="ctr">
-                    <a:lnR w="9525" cap="flat" cmpd="sng" algn="ctr">
-                      <a:solidFill>
-                        <a:srgbClr val="FFFFFF"/>
+                    <a:lnL w="12700" cap="flat" cmpd="sng" algn="ctr">
+                      <a:solidFill>
+                        <a:srgbClr val="E3E8EE"/>
+                      </a:solidFill>
+                    </a:lnL>
+                    <a:lnR w="12700" cap="flat" cmpd="sng" algn="ctr">
+                      <a:solidFill>
+                        <a:srgbClr val="E3E8EE"/>
                       </a:solidFill>
                     </a:lnR>
-                    <a:lnL w="9525" cap="flat" cmpd="sng" algn="ctr">
-                      <a:solidFill>
-                        <a:srgbClr val="FFFFFF"/>
-                      </a:solidFill>
-                    </a:lnL>
-                    <a:lnB w="9525" cap="flat" cmpd="sng" algn="ctr">
-                      <a:solidFill>
-                        <a:srgbClr val="DCE2E9"/>
+                    <a:lnT w="12700" cap="flat" cmpd="sng" algn="ctr">
+                      <a:solidFill>
+                        <a:srgbClr val="C5CEDA"/>
+                      </a:solidFill>
+                    </a:lnT>
+                    <a:lnB w="12700" cap="flat" cmpd="sng" algn="ctr">
+                      <a:solidFill>
+                        <a:srgbClr val="C5CEDA"/>
                       </a:solidFill>
                     </a:lnB>
-                    <a:lnT w="9525" cap="flat" cmpd="sng" algn="ctr">
-                      <a:solidFill>
-                        <a:srgbClr val="DCE2E9"/>
-                      </a:solidFill>
-                    </a:lnT>
                     <a:solidFill>
                       <a:srgbClr val="FFFFFF"/>
                     </a:solidFill>
@@ -6631,26 +6641,26 @@
                     </a:p>
                   </a:txBody>
                   <a:tcPr marL="82296" marR="82296" marT="50292" marB="50292" anchor="ctr">
-                    <a:lnR w="9525" cap="flat" cmpd="sng" algn="ctr">
-                      <a:solidFill>
-                        <a:srgbClr val="FFFFFF"/>
+                    <a:lnL w="12700" cap="flat" cmpd="sng" algn="ctr">
+                      <a:solidFill>
+                        <a:srgbClr val="E3E8EE"/>
+                      </a:solidFill>
+                    </a:lnL>
+                    <a:lnR w="12700" cap="flat" cmpd="sng" algn="ctr">
+                      <a:solidFill>
+                        <a:srgbClr val="C5CEDA"/>
                       </a:solidFill>
                     </a:lnR>
-                    <a:lnL w="9525" cap="flat" cmpd="sng" algn="ctr">
-                      <a:solidFill>
-                        <a:srgbClr val="FFFFFF"/>
-                      </a:solidFill>
-                    </a:lnL>
-                    <a:lnB w="9525" cap="flat" cmpd="sng" algn="ctr">
-                      <a:solidFill>
-                        <a:srgbClr val="DCE2E9"/>
+                    <a:lnT w="12700" cap="flat" cmpd="sng" algn="ctr">
+                      <a:solidFill>
+                        <a:srgbClr val="C5CEDA"/>
+                      </a:solidFill>
+                    </a:lnT>
+                    <a:lnB w="12700" cap="flat" cmpd="sng" algn="ctr">
+                      <a:solidFill>
+                        <a:srgbClr val="C5CEDA"/>
                       </a:solidFill>
                     </a:lnB>
-                    <a:lnT w="9525" cap="flat" cmpd="sng" algn="ctr">
-                      <a:solidFill>
-                        <a:srgbClr val="DCE2E9"/>
-                      </a:solidFill>
-                    </a:lnT>
                     <a:solidFill>
                       <a:srgbClr val="FFFFFF"/>
                     </a:solidFill>
@@ -6680,26 +6690,26 @@
                     </a:p>
                   </a:txBody>
                   <a:tcPr marL="82296" marR="82296" marT="50292" marB="50292" anchor="ctr">
-                    <a:lnR w="9525" cap="flat" cmpd="sng" algn="ctr">
-                      <a:solidFill>
-                        <a:srgbClr val="F6F8FA"/>
+                    <a:lnL w="12700" cap="flat" cmpd="sng" algn="ctr">
+                      <a:solidFill>
+                        <a:srgbClr val="C5CEDA"/>
+                      </a:solidFill>
+                    </a:lnL>
+                    <a:lnR w="12700" cap="flat" cmpd="sng" algn="ctr">
+                      <a:solidFill>
+                        <a:srgbClr val="E3E8EE"/>
                       </a:solidFill>
                     </a:lnR>
-                    <a:lnL w="9525" cap="flat" cmpd="sng" algn="ctr">
-                      <a:solidFill>
-                        <a:srgbClr val="F6F8FA"/>
-                      </a:solidFill>
-                    </a:lnL>
-                    <a:lnB w="9525" cap="flat" cmpd="sng" algn="ctr">
-                      <a:solidFill>
-                        <a:srgbClr val="DCE2E9"/>
+                    <a:lnT w="12700" cap="flat" cmpd="sng" algn="ctr">
+                      <a:solidFill>
+                        <a:srgbClr val="C5CEDA"/>
+                      </a:solidFill>
+                    </a:lnT>
+                    <a:lnB w="12700" cap="flat" cmpd="sng" algn="ctr">
+                      <a:solidFill>
+                        <a:srgbClr val="C5CEDA"/>
                       </a:solidFill>
                     </a:lnB>
-                    <a:lnT w="9525" cap="flat" cmpd="sng" algn="ctr">
-                      <a:solidFill>
-                        <a:srgbClr val="DCE2E9"/>
-                      </a:solidFill>
-                    </a:lnT>
                     <a:solidFill>
                       <a:srgbClr val="F6F8FA"/>
                     </a:solidFill>
@@ -6727,26 +6737,26 @@
                     </a:p>
                   </a:txBody>
                   <a:tcPr marL="82296" marR="82296" marT="50292" marB="50292" anchor="ctr">
-                    <a:lnR w="9525" cap="flat" cmpd="sng" algn="ctr">
-                      <a:solidFill>
-                        <a:srgbClr val="F6F8FA"/>
+                    <a:lnL w="12700" cap="flat" cmpd="sng" algn="ctr">
+                      <a:solidFill>
+                        <a:srgbClr val="E3E8EE"/>
+                      </a:solidFill>
+                    </a:lnL>
+                    <a:lnR w="12700" cap="flat" cmpd="sng" algn="ctr">
+                      <a:solidFill>
+                        <a:srgbClr val="E3E8EE"/>
                       </a:solidFill>
                     </a:lnR>
-                    <a:lnL w="9525" cap="flat" cmpd="sng" algn="ctr">
-                      <a:solidFill>
-                        <a:srgbClr val="F6F8FA"/>
-                      </a:solidFill>
-                    </a:lnL>
-                    <a:lnB w="9525" cap="flat" cmpd="sng" algn="ctr">
-                      <a:solidFill>
-                        <a:srgbClr val="DCE2E9"/>
+                    <a:lnT w="12700" cap="flat" cmpd="sng" algn="ctr">
+                      <a:solidFill>
+                        <a:srgbClr val="C5CEDA"/>
+                      </a:solidFill>
+                    </a:lnT>
+                    <a:lnB w="12700" cap="flat" cmpd="sng" algn="ctr">
+                      <a:solidFill>
+                        <a:srgbClr val="C5CEDA"/>
                       </a:solidFill>
                     </a:lnB>
-                    <a:lnT w="9525" cap="flat" cmpd="sng" algn="ctr">
-                      <a:solidFill>
-                        <a:srgbClr val="DCE2E9"/>
-                      </a:solidFill>
-                    </a:lnT>
                     <a:solidFill>
                       <a:srgbClr val="F6F8FA"/>
                     </a:solidFill>
@@ -6774,26 +6784,26 @@
                     </a:p>
                   </a:txBody>
                   <a:tcPr marL="82296" marR="82296" marT="50292" marB="50292" anchor="ctr">
-                    <a:lnR w="9525" cap="flat" cmpd="sng" algn="ctr">
-                      <a:solidFill>
-                        <a:srgbClr val="F6F8FA"/>
+                    <a:lnL w="12700" cap="flat" cmpd="sng" algn="ctr">
+                      <a:solidFill>
+                        <a:srgbClr val="E3E8EE"/>
+                      </a:solidFill>
+                    </a:lnL>
+                    <a:lnR w="12700" cap="flat" cmpd="sng" algn="ctr">
+                      <a:solidFill>
+                        <a:srgbClr val="C5CEDA"/>
                       </a:solidFill>
                     </a:lnR>
-                    <a:lnL w="9525" cap="flat" cmpd="sng" algn="ctr">
-                      <a:solidFill>
-                        <a:srgbClr val="F6F8FA"/>
-                      </a:solidFill>
-                    </a:lnL>
-                    <a:lnB w="9525" cap="flat" cmpd="sng" algn="ctr">
-                      <a:solidFill>
-                        <a:srgbClr val="DCE2E9"/>
+                    <a:lnT w="12700" cap="flat" cmpd="sng" algn="ctr">
+                      <a:solidFill>
+                        <a:srgbClr val="C5CEDA"/>
+                      </a:solidFill>
+                    </a:lnT>
+                    <a:lnB w="12700" cap="flat" cmpd="sng" algn="ctr">
+                      <a:solidFill>
+                        <a:srgbClr val="C5CEDA"/>
                       </a:solidFill>
                     </a:lnB>
-                    <a:lnT w="9525" cap="flat" cmpd="sng" algn="ctr">
-                      <a:solidFill>
-                        <a:srgbClr val="DCE2E9"/>
-                      </a:solidFill>
-                    </a:lnT>
                     <a:solidFill>
                       <a:srgbClr val="F6F8FA"/>
                     </a:solidFill>
@@ -6823,26 +6833,26 @@
                     </a:p>
                   </a:txBody>
                   <a:tcPr marL="82296" marR="82296" marT="50292" marB="50292" anchor="ctr">
-                    <a:lnR w="9525" cap="flat" cmpd="sng" algn="ctr">
-                      <a:solidFill>
-                        <a:srgbClr val="FFFFFF"/>
+                    <a:lnL w="12700" cap="flat" cmpd="sng" algn="ctr">
+                      <a:solidFill>
+                        <a:srgbClr val="C5CEDA"/>
+                      </a:solidFill>
+                    </a:lnL>
+                    <a:lnR w="12700" cap="flat" cmpd="sng" algn="ctr">
+                      <a:solidFill>
+                        <a:srgbClr val="E3E8EE"/>
                       </a:solidFill>
                     </a:lnR>
-                    <a:lnL w="9525" cap="flat" cmpd="sng" algn="ctr">
-                      <a:solidFill>
-                        <a:srgbClr val="FFFFFF"/>
-                      </a:solidFill>
-                    </a:lnL>
-                    <a:lnB w="9525" cap="flat" cmpd="sng" algn="ctr">
-                      <a:solidFill>
-                        <a:srgbClr val="DCE2E9"/>
+                    <a:lnT w="12700" cap="flat" cmpd="sng" algn="ctr">
+                      <a:solidFill>
+                        <a:srgbClr val="C5CEDA"/>
+                      </a:solidFill>
+                    </a:lnT>
+                    <a:lnB w="12700" cap="flat" cmpd="sng" algn="ctr">
+                      <a:solidFill>
+                        <a:srgbClr val="C5CEDA"/>
                       </a:solidFill>
                     </a:lnB>
-                    <a:lnT w="9525" cap="flat" cmpd="sng" algn="ctr">
-                      <a:solidFill>
-                        <a:srgbClr val="DCE2E9"/>
-                      </a:solidFill>
-                    </a:lnT>
                     <a:solidFill>
                       <a:srgbClr val="FFFFFF"/>
                     </a:solidFill>
@@ -6870,26 +6880,26 @@
                     </a:p>
                   </a:txBody>
                   <a:tcPr marL="82296" marR="82296" marT="50292" marB="50292" anchor="ctr">
-                    <a:lnR w="9525" cap="flat" cmpd="sng" algn="ctr">
-                      <a:solidFill>
-                        <a:srgbClr val="FFFFFF"/>
+                    <a:lnL w="12700" cap="flat" cmpd="sng" algn="ctr">
+                      <a:solidFill>
+                        <a:srgbClr val="E3E8EE"/>
+                      </a:solidFill>
+                    </a:lnL>
+                    <a:lnR w="12700" cap="flat" cmpd="sng" algn="ctr">
+                      <a:solidFill>
+                        <a:srgbClr val="E3E8EE"/>
                       </a:solidFill>
                     </a:lnR>
-                    <a:lnL w="9525" cap="flat" cmpd="sng" algn="ctr">
-                      <a:solidFill>
-                        <a:srgbClr val="FFFFFF"/>
-                      </a:solidFill>
-                    </a:lnL>
-                    <a:lnB w="9525" cap="flat" cmpd="sng" algn="ctr">
-                      <a:solidFill>
-                        <a:srgbClr val="DCE2E9"/>
+                    <a:lnT w="12700" cap="flat" cmpd="sng" algn="ctr">
+                      <a:solidFill>
+                        <a:srgbClr val="C5CEDA"/>
+                      </a:solidFill>
+                    </a:lnT>
+                    <a:lnB w="12700" cap="flat" cmpd="sng" algn="ctr">
+                      <a:solidFill>
+                        <a:srgbClr val="C5CEDA"/>
                       </a:solidFill>
                     </a:lnB>
-                    <a:lnT w="9525" cap="flat" cmpd="sng" algn="ctr">
-                      <a:solidFill>
-                        <a:srgbClr val="DCE2E9"/>
-                      </a:solidFill>
-                    </a:lnT>
                     <a:solidFill>
                       <a:srgbClr val="FFFFFF"/>
                     </a:solidFill>
@@ -6917,26 +6927,26 @@
                     </a:p>
                   </a:txBody>
                   <a:tcPr marL="82296" marR="82296" marT="50292" marB="50292" anchor="ctr">
-                    <a:lnR w="9525" cap="flat" cmpd="sng" algn="ctr">
-                      <a:solidFill>
-                        <a:srgbClr val="FFFFFF"/>
+                    <a:lnL w="12700" cap="flat" cmpd="sng" algn="ctr">
+                      <a:solidFill>
+                        <a:srgbClr val="E3E8EE"/>
+                      </a:solidFill>
+                    </a:lnL>
+                    <a:lnR w="12700" cap="flat" cmpd="sng" algn="ctr">
+                      <a:solidFill>
+                        <a:srgbClr val="C5CEDA"/>
                       </a:solidFill>
                     </a:lnR>
-                    <a:lnL w="9525" cap="flat" cmpd="sng" algn="ctr">
-                      <a:solidFill>
-                        <a:srgbClr val="FFFFFF"/>
-                      </a:solidFill>
-                    </a:lnL>
-                    <a:lnB w="9525" cap="flat" cmpd="sng" algn="ctr">
-                      <a:solidFill>
-                        <a:srgbClr val="DCE2E9"/>
+                    <a:lnT w="12700" cap="flat" cmpd="sng" algn="ctr">
+                      <a:solidFill>
+                        <a:srgbClr val="C5CEDA"/>
+                      </a:solidFill>
+                    </a:lnT>
+                    <a:lnB w="12700" cap="flat" cmpd="sng" algn="ctr">
+                      <a:solidFill>
+                        <a:srgbClr val="C5CEDA"/>
                       </a:solidFill>
                     </a:lnB>
-                    <a:lnT w="9525" cap="flat" cmpd="sng" algn="ctr">
-                      <a:solidFill>
-                        <a:srgbClr val="DCE2E9"/>
-                      </a:solidFill>
-                    </a:lnT>
                     <a:solidFill>
                       <a:srgbClr val="FFFFFF"/>
                     </a:solidFill>
@@ -6966,26 +6976,26 @@
                     </a:p>
                   </a:txBody>
                   <a:tcPr marL="82296" marR="82296" marT="50292" marB="50292" anchor="ctr">
-                    <a:lnR w="9525" cap="flat" cmpd="sng" algn="ctr">
-                      <a:solidFill>
-                        <a:srgbClr val="F6F8FA"/>
+                    <a:lnL w="12700" cap="flat" cmpd="sng" algn="ctr">
+                      <a:solidFill>
+                        <a:srgbClr val="C5CEDA"/>
+                      </a:solidFill>
+                    </a:lnL>
+                    <a:lnR w="12700" cap="flat" cmpd="sng" algn="ctr">
+                      <a:solidFill>
+                        <a:srgbClr val="E3E8EE"/>
                       </a:solidFill>
                     </a:lnR>
-                    <a:lnL w="9525" cap="flat" cmpd="sng" algn="ctr">
-                      <a:solidFill>
-                        <a:srgbClr val="F6F8FA"/>
-                      </a:solidFill>
-                    </a:lnL>
-                    <a:lnB w="9525" cap="flat" cmpd="sng" algn="ctr">
-                      <a:solidFill>
-                        <a:srgbClr val="DCE2E9"/>
+                    <a:lnT w="12700" cap="flat" cmpd="sng" algn="ctr">
+                      <a:solidFill>
+                        <a:srgbClr val="C5CEDA"/>
+                      </a:solidFill>
+                    </a:lnT>
+                    <a:lnB w="12700" cap="flat" cmpd="sng" algn="ctr">
+                      <a:solidFill>
+                        <a:srgbClr val="C5CEDA"/>
                       </a:solidFill>
                     </a:lnB>
-                    <a:lnT w="9525" cap="flat" cmpd="sng" algn="ctr">
-                      <a:solidFill>
-                        <a:srgbClr val="DCE2E9"/>
-                      </a:solidFill>
-                    </a:lnT>
                     <a:solidFill>
                       <a:srgbClr val="F6F8FA"/>
                     </a:solidFill>
@@ -7013,26 +7023,26 @@
                     </a:p>
                   </a:txBody>
                   <a:tcPr marL="82296" marR="82296" marT="50292" marB="50292" anchor="ctr">
-                    <a:lnR w="9525" cap="flat" cmpd="sng" algn="ctr">
-                      <a:solidFill>
-                        <a:srgbClr val="F6F8FA"/>
+                    <a:lnL w="12700" cap="flat" cmpd="sng" algn="ctr">
+                      <a:solidFill>
+                        <a:srgbClr val="E3E8EE"/>
+                      </a:solidFill>
+                    </a:lnL>
+                    <a:lnR w="12700" cap="flat" cmpd="sng" algn="ctr">
+                      <a:solidFill>
+                        <a:srgbClr val="E3E8EE"/>
                       </a:solidFill>
                     </a:lnR>
-                    <a:lnL w="9525" cap="flat" cmpd="sng" algn="ctr">
-                      <a:solidFill>
-                        <a:srgbClr val="F6F8FA"/>
-                      </a:solidFill>
-                    </a:lnL>
-                    <a:lnB w="9525" cap="flat" cmpd="sng" algn="ctr">
-                      <a:solidFill>
-                        <a:srgbClr val="DCE2E9"/>
+                    <a:lnT w="12700" cap="flat" cmpd="sng" algn="ctr">
+                      <a:solidFill>
+                        <a:srgbClr val="C5CEDA"/>
+                      </a:solidFill>
+                    </a:lnT>
+                    <a:lnB w="12700" cap="flat" cmpd="sng" algn="ctr">
+                      <a:solidFill>
+                        <a:srgbClr val="C5CEDA"/>
                       </a:solidFill>
                     </a:lnB>
-                    <a:lnT w="9525" cap="flat" cmpd="sng" algn="ctr">
-                      <a:solidFill>
-                        <a:srgbClr val="DCE2E9"/>
-                      </a:solidFill>
-                    </a:lnT>
                     <a:solidFill>
                       <a:srgbClr val="F6F8FA"/>
                     </a:solidFill>
@@ -7060,26 +7070,26 @@
                     </a:p>
                   </a:txBody>
                   <a:tcPr marL="82296" marR="82296" marT="50292" marB="50292" anchor="ctr">
-                    <a:lnR w="9525" cap="flat" cmpd="sng" algn="ctr">
-                      <a:solidFill>
-                        <a:srgbClr val="F6F8FA"/>
+                    <a:lnL w="12700" cap="flat" cmpd="sng" algn="ctr">
+                      <a:solidFill>
+                        <a:srgbClr val="E3E8EE"/>
+                      </a:solidFill>
+                    </a:lnL>
+                    <a:lnR w="12700" cap="flat" cmpd="sng" algn="ctr">
+                      <a:solidFill>
+                        <a:srgbClr val="C5CEDA"/>
                       </a:solidFill>
                     </a:lnR>
-                    <a:lnL w="9525" cap="flat" cmpd="sng" algn="ctr">
-                      <a:solidFill>
-                        <a:srgbClr val="F6F8FA"/>
-                      </a:solidFill>
-                    </a:lnL>
-                    <a:lnB w="9525" cap="flat" cmpd="sng" algn="ctr">
-                      <a:solidFill>
-                        <a:srgbClr val="DCE2E9"/>
+                    <a:lnT w="12700" cap="flat" cmpd="sng" algn="ctr">
+                      <a:solidFill>
+                        <a:srgbClr val="C5CEDA"/>
+                      </a:solidFill>
+                    </a:lnT>
+                    <a:lnB w="12700" cap="flat" cmpd="sng" algn="ctr">
+                      <a:solidFill>
+                        <a:srgbClr val="C5CEDA"/>
                       </a:solidFill>
                     </a:lnB>
-                    <a:lnT w="9525" cap="flat" cmpd="sng" algn="ctr">
-                      <a:solidFill>
-                        <a:srgbClr val="DCE2E9"/>
-                      </a:solidFill>
-                    </a:lnT>
                     <a:solidFill>
                       <a:srgbClr val="F6F8FA"/>
                     </a:solidFill>
@@ -7109,26 +7119,26 @@
                     </a:p>
                   </a:txBody>
                   <a:tcPr marL="82296" marR="82296" marT="50292" marB="50292" anchor="ctr">
-                    <a:lnR w="9525" cap="flat" cmpd="sng" algn="ctr">
-                      <a:solidFill>
-                        <a:srgbClr val="FFFFFF"/>
+                    <a:lnL w="12700" cap="flat" cmpd="sng" algn="ctr">
+                      <a:solidFill>
+                        <a:srgbClr val="C5CEDA"/>
+                      </a:solidFill>
+                    </a:lnL>
+                    <a:lnR w="12700" cap="flat" cmpd="sng" algn="ctr">
+                      <a:solidFill>
+                        <a:srgbClr val="E3E8EE"/>
                       </a:solidFill>
                     </a:lnR>
-                    <a:lnL w="9525" cap="flat" cmpd="sng" algn="ctr">
-                      <a:solidFill>
-                        <a:srgbClr val="FFFFFF"/>
-                      </a:solidFill>
-                    </a:lnL>
-                    <a:lnB w="9525" cap="flat" cmpd="sng" algn="ctr">
-                      <a:solidFill>
-                        <a:srgbClr val="DCE2E9"/>
+                    <a:lnT w="12700" cap="flat" cmpd="sng" algn="ctr">
+                      <a:solidFill>
+                        <a:srgbClr val="C5CEDA"/>
+                      </a:solidFill>
+                    </a:lnT>
+                    <a:lnB w="12700" cap="flat" cmpd="sng" algn="ctr">
+                      <a:solidFill>
+                        <a:srgbClr val="C5CEDA"/>
                       </a:solidFill>
                     </a:lnB>
-                    <a:lnT w="9525" cap="flat" cmpd="sng" algn="ctr">
-                      <a:solidFill>
-                        <a:srgbClr val="DCE2E9"/>
-                      </a:solidFill>
-                    </a:lnT>
                     <a:solidFill>
                       <a:srgbClr val="FFFFFF"/>
                     </a:solidFill>
@@ -7156,26 +7166,26 @@
                     </a:p>
                   </a:txBody>
                   <a:tcPr marL="82296" marR="82296" marT="50292" marB="50292" anchor="ctr">
-                    <a:lnR w="9525" cap="flat" cmpd="sng" algn="ctr">
-                      <a:solidFill>
-                        <a:srgbClr val="FFFFFF"/>
+                    <a:lnL w="12700" cap="flat" cmpd="sng" algn="ctr">
+                      <a:solidFill>
+                        <a:srgbClr val="E3E8EE"/>
+                      </a:solidFill>
+                    </a:lnL>
+                    <a:lnR w="12700" cap="flat" cmpd="sng" algn="ctr">
+                      <a:solidFill>
+                        <a:srgbClr val="E3E8EE"/>
                       </a:solidFill>
                     </a:lnR>
-                    <a:lnL w="9525" cap="flat" cmpd="sng" algn="ctr">
-                      <a:solidFill>
-                        <a:srgbClr val="FFFFFF"/>
-                      </a:solidFill>
-                    </a:lnL>
-                    <a:lnB w="9525" cap="flat" cmpd="sng" algn="ctr">
-                      <a:solidFill>
-                        <a:srgbClr val="DCE2E9"/>
+                    <a:lnT w="12700" cap="flat" cmpd="sng" algn="ctr">
+                      <a:solidFill>
+                        <a:srgbClr val="C5CEDA"/>
+                      </a:solidFill>
+                    </a:lnT>
+                    <a:lnB w="12700" cap="flat" cmpd="sng" algn="ctr">
+                      <a:solidFill>
+                        <a:srgbClr val="C5CEDA"/>
                       </a:solidFill>
                     </a:lnB>
-                    <a:lnT w="9525" cap="flat" cmpd="sng" algn="ctr">
-                      <a:solidFill>
-                        <a:srgbClr val="DCE2E9"/>
-                      </a:solidFill>
-                    </a:lnT>
                     <a:solidFill>
                       <a:srgbClr val="FFFFFF"/>
                     </a:solidFill>
@@ -7203,26 +7213,26 @@
                     </a:p>
                   </a:txBody>
                   <a:tcPr marL="82296" marR="82296" marT="50292" marB="50292" anchor="ctr">
-                    <a:lnR w="9525" cap="flat" cmpd="sng" algn="ctr">
-                      <a:solidFill>
-                        <a:srgbClr val="FFFFFF"/>
+                    <a:lnL w="12700" cap="flat" cmpd="sng" algn="ctr">
+                      <a:solidFill>
+                        <a:srgbClr val="E3E8EE"/>
+                      </a:solidFill>
+                    </a:lnL>
+                    <a:lnR w="12700" cap="flat" cmpd="sng" algn="ctr">
+                      <a:solidFill>
+                        <a:srgbClr val="C5CEDA"/>
                       </a:solidFill>
                     </a:lnR>
-                    <a:lnL w="9525" cap="flat" cmpd="sng" algn="ctr">
-                      <a:solidFill>
-                        <a:srgbClr val="FFFFFF"/>
-                      </a:solidFill>
-                    </a:lnL>
-                    <a:lnB w="9525" cap="flat" cmpd="sng" algn="ctr">
-                      <a:solidFill>
-                        <a:srgbClr val="DCE2E9"/>
+                    <a:lnT w="12700" cap="flat" cmpd="sng" algn="ctr">
+                      <a:solidFill>
+                        <a:srgbClr val="C5CEDA"/>
+                      </a:solidFill>
+                    </a:lnT>
+                    <a:lnB w="12700" cap="flat" cmpd="sng" algn="ctr">
+                      <a:solidFill>
+                        <a:srgbClr val="C5CEDA"/>
                       </a:solidFill>
                     </a:lnB>
-                    <a:lnT w="9525" cap="flat" cmpd="sng" algn="ctr">
-                      <a:solidFill>
-                        <a:srgbClr val="DCE2E9"/>
-                      </a:solidFill>
-                    </a:lnT>
                     <a:solidFill>
                       <a:srgbClr val="FFFFFF"/>
                     </a:solidFill>
@@ -7252,26 +7262,26 @@
                     </a:p>
                   </a:txBody>
                   <a:tcPr marL="82296" marR="82296" marT="50292" marB="50292" anchor="ctr">
-                    <a:lnR w="9525" cap="flat" cmpd="sng" algn="ctr">
-                      <a:solidFill>
-                        <a:srgbClr val="F6F8FA"/>
+                    <a:lnL w="12700" cap="flat" cmpd="sng" algn="ctr">
+                      <a:solidFill>
+                        <a:srgbClr val="C5CEDA"/>
+                      </a:solidFill>
+                    </a:lnL>
+                    <a:lnR w="12700" cap="flat" cmpd="sng" algn="ctr">
+                      <a:solidFill>
+                        <a:srgbClr val="E3E8EE"/>
                       </a:solidFill>
                     </a:lnR>
-                    <a:lnL w="9525" cap="flat" cmpd="sng" algn="ctr">
-                      <a:solidFill>
-                        <a:srgbClr val="F6F8FA"/>
-                      </a:solidFill>
-                    </a:lnL>
-                    <a:lnB w="9525" cap="flat" cmpd="sng" algn="ctr">
-                      <a:solidFill>
-                        <a:srgbClr val="DCE2E9"/>
+                    <a:lnT w="12700" cap="flat" cmpd="sng" algn="ctr">
+                      <a:solidFill>
+                        <a:srgbClr val="C5CEDA"/>
+                      </a:solidFill>
+                    </a:lnT>
+                    <a:lnB w="12700" cap="flat" cmpd="sng" algn="ctr">
+                      <a:solidFill>
+                        <a:srgbClr val="C5CEDA"/>
                       </a:solidFill>
                     </a:lnB>
-                    <a:lnT w="9525" cap="flat" cmpd="sng" algn="ctr">
-                      <a:solidFill>
-                        <a:srgbClr val="DCE2E9"/>
-                      </a:solidFill>
-                    </a:lnT>
                     <a:solidFill>
                       <a:srgbClr val="F6F8FA"/>
                     </a:solidFill>
@@ -7299,26 +7309,26 @@
                     </a:p>
                   </a:txBody>
                   <a:tcPr marL="82296" marR="82296" marT="50292" marB="50292" anchor="ctr">
-                    <a:lnR w="9525" cap="flat" cmpd="sng" algn="ctr">
-                      <a:solidFill>
-                        <a:srgbClr val="F6F8FA"/>
+                    <a:lnL w="12700" cap="flat" cmpd="sng" algn="ctr">
+                      <a:solidFill>
+                        <a:srgbClr val="E3E8EE"/>
+                      </a:solidFill>
+                    </a:lnL>
+                    <a:lnR w="12700" cap="flat" cmpd="sng" algn="ctr">
+                      <a:solidFill>
+                        <a:srgbClr val="E3E8EE"/>
                       </a:solidFill>
                     </a:lnR>
-                    <a:lnL w="9525" cap="flat" cmpd="sng" algn="ctr">
-                      <a:solidFill>
-                        <a:srgbClr val="F6F8FA"/>
-                      </a:solidFill>
-                    </a:lnL>
-                    <a:lnB w="9525" cap="flat" cmpd="sng" algn="ctr">
-                      <a:solidFill>
-                        <a:srgbClr val="DCE2E9"/>
+                    <a:lnT w="12700" cap="flat" cmpd="sng" algn="ctr">
+                      <a:solidFill>
+                        <a:srgbClr val="C5CEDA"/>
+                      </a:solidFill>
+                    </a:lnT>
+                    <a:lnB w="12700" cap="flat" cmpd="sng" algn="ctr">
+                      <a:solidFill>
+                        <a:srgbClr val="C5CEDA"/>
                       </a:solidFill>
                     </a:lnB>
-                    <a:lnT w="9525" cap="flat" cmpd="sng" algn="ctr">
-                      <a:solidFill>
-                        <a:srgbClr val="DCE2E9"/>
-                      </a:solidFill>
-                    </a:lnT>
                     <a:solidFill>
                       <a:srgbClr val="F6F8FA"/>
                     </a:solidFill>
@@ -7346,26 +7356,26 @@
                     </a:p>
                   </a:txBody>
                   <a:tcPr marL="82296" marR="82296" marT="50292" marB="50292" anchor="ctr">
-                    <a:lnR w="9525" cap="flat" cmpd="sng" algn="ctr">
-                      <a:solidFill>
-                        <a:srgbClr val="F6F8FA"/>
+                    <a:lnL w="12700" cap="flat" cmpd="sng" algn="ctr">
+                      <a:solidFill>
+                        <a:srgbClr val="E3E8EE"/>
+                      </a:solidFill>
+                    </a:lnL>
+                    <a:lnR w="12700" cap="flat" cmpd="sng" algn="ctr">
+                      <a:solidFill>
+                        <a:srgbClr val="C5CEDA"/>
                       </a:solidFill>
                     </a:lnR>
-                    <a:lnL w="9525" cap="flat" cmpd="sng" algn="ctr">
-                      <a:solidFill>
-                        <a:srgbClr val="F6F8FA"/>
-                      </a:solidFill>
-                    </a:lnL>
-                    <a:lnB w="9525" cap="flat" cmpd="sng" algn="ctr">
-                      <a:solidFill>
-                        <a:srgbClr val="DCE2E9"/>
+                    <a:lnT w="12700" cap="flat" cmpd="sng" algn="ctr">
+                      <a:solidFill>
+                        <a:srgbClr val="C5CEDA"/>
+                      </a:solidFill>
+                    </a:lnT>
+                    <a:lnB w="12700" cap="flat" cmpd="sng" algn="ctr">
+                      <a:solidFill>
+                        <a:srgbClr val="C5CEDA"/>
                       </a:solidFill>
                     </a:lnB>
-                    <a:lnT w="9525" cap="flat" cmpd="sng" algn="ctr">
-                      <a:solidFill>
-                        <a:srgbClr val="DCE2E9"/>
-                      </a:solidFill>
-                    </a:lnT>
                     <a:solidFill>
                       <a:srgbClr val="F6F8FA"/>
                     </a:solidFill>
@@ -7395,26 +7405,26 @@
                     </a:p>
                   </a:txBody>
                   <a:tcPr marL="82296" marR="82296" marT="50292" marB="50292" anchor="ctr">
-                    <a:lnR w="9525" cap="flat" cmpd="sng" algn="ctr">
-                      <a:solidFill>
-                        <a:srgbClr val="FFFFFF"/>
+                    <a:lnL w="12700" cap="flat" cmpd="sng" algn="ctr">
+                      <a:solidFill>
+                        <a:srgbClr val="C5CEDA"/>
+                      </a:solidFill>
+                    </a:lnL>
+                    <a:lnR w="12700" cap="flat" cmpd="sng" algn="ctr">
+                      <a:solidFill>
+                        <a:srgbClr val="E3E8EE"/>
                       </a:solidFill>
                     </a:lnR>
-                    <a:lnL w="9525" cap="flat" cmpd="sng" algn="ctr">
-                      <a:solidFill>
-                        <a:srgbClr val="FFFFFF"/>
-                      </a:solidFill>
-                    </a:lnL>
-                    <a:lnB w="9525" cap="flat" cmpd="sng" algn="ctr">
-                      <a:solidFill>
-                        <a:srgbClr val="DCE2E9"/>
+                    <a:lnT w="12700" cap="flat" cmpd="sng" algn="ctr">
+                      <a:solidFill>
+                        <a:srgbClr val="C5CEDA"/>
+                      </a:solidFill>
+                    </a:lnT>
+                    <a:lnB w="15875" cap="flat" cmpd="sng" algn="ctr">
+                      <a:solidFill>
+                        <a:srgbClr val="C5CEDA"/>
                       </a:solidFill>
                     </a:lnB>
-                    <a:lnT w="9525" cap="flat" cmpd="sng" algn="ctr">
-                      <a:solidFill>
-                        <a:srgbClr val="DCE2E9"/>
-                      </a:solidFill>
-                    </a:lnT>
                     <a:solidFill>
                       <a:srgbClr val="FFFFFF"/>
                     </a:solidFill>
@@ -7442,26 +7452,26 @@
                     </a:p>
                   </a:txBody>
                   <a:tcPr marL="82296" marR="82296" marT="50292" marB="50292" anchor="ctr">
-                    <a:lnR w="9525" cap="flat" cmpd="sng" algn="ctr">
-                      <a:solidFill>
-                        <a:srgbClr val="FFFFFF"/>
+                    <a:lnL w="12700" cap="flat" cmpd="sng" algn="ctr">
+                      <a:solidFill>
+                        <a:srgbClr val="E3E8EE"/>
+                      </a:solidFill>
+                    </a:lnL>
+                    <a:lnR w="12700" cap="flat" cmpd="sng" algn="ctr">
+                      <a:solidFill>
+                        <a:srgbClr val="E3E8EE"/>
                       </a:solidFill>
                     </a:lnR>
-                    <a:lnL w="9525" cap="flat" cmpd="sng" algn="ctr">
-                      <a:solidFill>
-                        <a:srgbClr val="FFFFFF"/>
-                      </a:solidFill>
-                    </a:lnL>
-                    <a:lnB w="9525" cap="flat" cmpd="sng" algn="ctr">
-                      <a:solidFill>
-                        <a:srgbClr val="DCE2E9"/>
+                    <a:lnT w="12700" cap="flat" cmpd="sng" algn="ctr">
+                      <a:solidFill>
+                        <a:srgbClr val="C5CEDA"/>
+                      </a:solidFill>
+                    </a:lnT>
+                    <a:lnB w="15875" cap="flat" cmpd="sng" algn="ctr">
+                      <a:solidFill>
+                        <a:srgbClr val="C5CEDA"/>
                       </a:solidFill>
                     </a:lnB>
-                    <a:lnT w="9525" cap="flat" cmpd="sng" algn="ctr">
-                      <a:solidFill>
-                        <a:srgbClr val="DCE2E9"/>
-                      </a:solidFill>
-                    </a:lnT>
                     <a:solidFill>
                       <a:srgbClr val="FFFFFF"/>
                     </a:solidFill>
@@ -7489,26 +7499,26 @@
                     </a:p>
                   </a:txBody>
                   <a:tcPr marL="82296" marR="82296" marT="50292" marB="50292" anchor="ctr">
-                    <a:lnR w="9525" cap="flat" cmpd="sng" algn="ctr">
-                      <a:solidFill>
-                        <a:srgbClr val="FFFFFF"/>
+                    <a:lnL w="12700" cap="flat" cmpd="sng" algn="ctr">
+                      <a:solidFill>
+                        <a:srgbClr val="E3E8EE"/>
+                      </a:solidFill>
+                    </a:lnL>
+                    <a:lnR w="12700" cap="flat" cmpd="sng" algn="ctr">
+                      <a:solidFill>
+                        <a:srgbClr val="C5CEDA"/>
                       </a:solidFill>
                     </a:lnR>
-                    <a:lnL w="9525" cap="flat" cmpd="sng" algn="ctr">
-                      <a:solidFill>
-                        <a:srgbClr val="FFFFFF"/>
-                      </a:solidFill>
-                    </a:lnL>
-                    <a:lnB w="9525" cap="flat" cmpd="sng" algn="ctr">
-                      <a:solidFill>
-                        <a:srgbClr val="DCE2E9"/>
+                    <a:lnT w="12700" cap="flat" cmpd="sng" algn="ctr">
+                      <a:solidFill>
+                        <a:srgbClr val="C5CEDA"/>
+                      </a:solidFill>
+                    </a:lnT>
+                    <a:lnB w="15875" cap="flat" cmpd="sng" algn="ctr">
+                      <a:solidFill>
+                        <a:srgbClr val="C5CEDA"/>
                       </a:solidFill>
                     </a:lnB>
-                    <a:lnT w="9525" cap="flat" cmpd="sng" algn="ctr">
-                      <a:solidFill>
-                        <a:srgbClr val="DCE2E9"/>
-                      </a:solidFill>
-                    </a:lnT>
                     <a:solidFill>
                       <a:srgbClr val="FFFFFF"/>
                     </a:solidFill>
@@ -7848,14 +7858,16 @@
           </a:xfrm>
           <a:prstGeom prst="roundRect">
             <a:avLst>
-              <a:gd name="adj" fmla="val 5932"/>
+              <a:gd name="adj" fmla="val 5508"/>
             </a:avLst>
           </a:prstGeom>
           <a:solidFill>
             <a:srgbClr val="1D2735"/>
           </a:solidFill>
-          <a:ln>
-            <a:noFill/>
+          <a:ln w="15875">
+            <a:solidFill>
+              <a:srgbClr val="55606E"/>
+            </a:solidFill>
           </a:ln>
           <a:effectLst/>
         </p:spPr>
@@ -8003,14 +8015,16 @@
           </a:xfrm>
           <a:prstGeom prst="roundRect">
             <a:avLst>
-              <a:gd name="adj" fmla="val 5932"/>
+              <a:gd name="adj" fmla="val 5508"/>
             </a:avLst>
           </a:prstGeom>
           <a:solidFill>
-            <a:srgbClr val="2B3849"/>
+            <a:srgbClr val="1D2735"/>
           </a:solidFill>
-          <a:ln>
-            <a:noFill/>
+          <a:ln w="15875">
+            <a:solidFill>
+              <a:srgbClr val="55606E"/>
+            </a:solidFill>
           </a:ln>
           <a:effectLst/>
         </p:spPr>
@@ -8045,16 +8059,18 @@
         <p:spPr>
           <a:xfrm>
             <a:off x="6062472" y="2560320"/>
-            <a:ext cx="512064" cy="512064"/>
+            <a:ext cx="530352" cy="530352"/>
           </a:xfrm>
           <a:prstGeom prst="ellipse">
             <a:avLst/>
           </a:prstGeom>
           <a:solidFill>
-            <a:srgbClr val="E97722"/>
+            <a:srgbClr val="2B3849"/>
           </a:solidFill>
-          <a:ln>
-            <a:noFill/>
+          <a:ln w="12700">
+            <a:solidFill>
+              <a:srgbClr val="4A5C75"/>
+            </a:solidFill>
           </a:ln>
           <a:effectLst/>
         </p:spPr>
@@ -8097,7 +8113,7 @@
         <p:spPr>
           <a:xfrm>
             <a:off x="6195059" y="2692908"/>
-            <a:ext cx="246888" cy="246888"/>
+            <a:ext cx="265176" cy="265176"/>
           </a:xfrm>
           <a:prstGeom prst="rect">
             <a:avLst/>
@@ -8112,8 +8128,8 @@
         </p:nvSpPr>
         <p:spPr>
           <a:xfrm>
-            <a:off x="6720840" y="2633472"/>
-            <a:ext cx="4474433" cy="365760"/>
+            <a:off x="6739128" y="2633472"/>
+            <a:ext cx="4456145" cy="365760"/>
           </a:xfrm>
           <a:prstGeom prst="rect">
             <a:avLst/>
@@ -8191,14 +8207,16 @@
           </a:xfrm>
           <a:prstGeom prst="roundRect">
             <a:avLst>
-              <a:gd name="adj" fmla="val 10769"/>
+              <a:gd name="adj" fmla="val 10000"/>
             </a:avLst>
           </a:prstGeom>
           <a:solidFill>
             <a:srgbClr val="1D2735"/>
           </a:solidFill>
-          <a:ln>
-            <a:noFill/>
+          <a:ln w="15875">
+            <a:solidFill>
+              <a:srgbClr val="55606E"/>
+            </a:solidFill>
           </a:ln>
           <a:effectLst/>
         </p:spPr>
@@ -8233,7 +8251,7 @@
         <p:spPr>
           <a:xfrm>
             <a:off x="996696" y="5047488"/>
-            <a:ext cx="512064" cy="512064"/>
+            <a:ext cx="530352" cy="530352"/>
           </a:xfrm>
           <a:prstGeom prst="ellipse">
             <a:avLst/>
@@ -8241,8 +8259,10 @@
           <a:solidFill>
             <a:srgbClr val="2B3849"/>
           </a:solidFill>
-          <a:ln>
-            <a:noFill/>
+          <a:ln w="12700">
+            <a:solidFill>
+              <a:srgbClr val="4A5C75"/>
+            </a:solidFill>
           </a:ln>
           <a:effectLst/>
         </p:spPr>
@@ -8285,7 +8305,7 @@
         <p:spPr>
           <a:xfrm>
             <a:off x="1129284" y="5180076"/>
-            <a:ext cx="246888" cy="246888"/>
+            <a:ext cx="265176" cy="265176"/>
           </a:xfrm>
           <a:prstGeom prst="rect">
             <a:avLst/>
@@ -8300,8 +8320,8 @@
         </p:nvSpPr>
         <p:spPr>
           <a:xfrm>
-            <a:off x="1655064" y="4937760"/>
-            <a:ext cx="9540209" cy="310896"/>
+            <a:off x="1673352" y="4937760"/>
+            <a:ext cx="9521921" cy="310896"/>
           </a:xfrm>
           <a:prstGeom prst="rect">
             <a:avLst/>
@@ -8729,26 +8749,26 @@
                     </a:p>
                   </a:txBody>
                   <a:tcPr marL="82296" marR="82296" marT="50292" marB="50292" anchor="ctr">
-                    <a:lnB w="9525" cap="flat" cmpd="sng" algn="ctr">
+                    <a:lnL w="12700" cap="flat" cmpd="sng" algn="ctr">
                       <a:solidFill>
                         <a:srgbClr val="232E3E"/>
                       </a:solidFill>
+                    </a:lnL>
+                    <a:lnR w="12700" cap="flat" cmpd="sng" algn="ctr">
+                      <a:solidFill>
+                        <a:srgbClr val="232E3E"/>
+                      </a:solidFill>
+                    </a:lnR>
+                    <a:lnT w="12700" cap="flat" cmpd="sng" algn="ctr">
+                      <a:solidFill>
+                        <a:srgbClr val="232E3E"/>
+                      </a:solidFill>
+                    </a:lnT>
+                    <a:lnB w="12700" cap="flat" cmpd="sng" algn="ctr">
+                      <a:solidFill>
+                        <a:srgbClr val="232E3E"/>
+                      </a:solidFill>
                     </a:lnB>
-                    <a:lnT w="9525" cap="flat" cmpd="sng" algn="ctr">
-                      <a:solidFill>
-                        <a:srgbClr val="232E3E"/>
-                      </a:solidFill>
-                    </a:lnT>
-                    <a:lnR w="9525" cap="flat" cmpd="sng" algn="ctr">
-                      <a:solidFill>
-                        <a:srgbClr val="232E3E"/>
-                      </a:solidFill>
-                    </a:lnR>
-                    <a:lnL w="9525" cap="flat" cmpd="sng" algn="ctr">
-                      <a:solidFill>
-                        <a:srgbClr val="232E3E"/>
-                      </a:solidFill>
-                    </a:lnL>
                     <a:solidFill>
                       <a:srgbClr val="232E3E"/>
                     </a:solidFill>
@@ -8776,26 +8796,26 @@
                     </a:p>
                   </a:txBody>
                   <a:tcPr marL="82296" marR="82296" marT="50292" marB="50292" anchor="ctr">
-                    <a:lnB w="9525" cap="flat" cmpd="sng" algn="ctr">
+                    <a:lnL w="12700" cap="flat" cmpd="sng" algn="ctr">
                       <a:solidFill>
                         <a:srgbClr val="232E3E"/>
                       </a:solidFill>
+                    </a:lnL>
+                    <a:lnR w="12700" cap="flat" cmpd="sng" algn="ctr">
+                      <a:solidFill>
+                        <a:srgbClr val="232E3E"/>
+                      </a:solidFill>
+                    </a:lnR>
+                    <a:lnT w="12700" cap="flat" cmpd="sng" algn="ctr">
+                      <a:solidFill>
+                        <a:srgbClr val="232E3E"/>
+                      </a:solidFill>
+                    </a:lnT>
+                    <a:lnB w="12700" cap="flat" cmpd="sng" algn="ctr">
+                      <a:solidFill>
+                        <a:srgbClr val="232E3E"/>
+                      </a:solidFill>
                     </a:lnB>
-                    <a:lnT w="9525" cap="flat" cmpd="sng" algn="ctr">
-                      <a:solidFill>
-                        <a:srgbClr val="232E3E"/>
-                      </a:solidFill>
-                    </a:lnT>
-                    <a:lnR w="9525" cap="flat" cmpd="sng" algn="ctr">
-                      <a:solidFill>
-                        <a:srgbClr val="232E3E"/>
-                      </a:solidFill>
-                    </a:lnR>
-                    <a:lnL w="9525" cap="flat" cmpd="sng" algn="ctr">
-                      <a:solidFill>
-                        <a:srgbClr val="232E3E"/>
-                      </a:solidFill>
-                    </a:lnL>
                     <a:solidFill>
                       <a:srgbClr val="232E3E"/>
                     </a:solidFill>
@@ -8823,26 +8843,26 @@
                     </a:p>
                   </a:txBody>
                   <a:tcPr marL="82296" marR="82296" marT="50292" marB="50292" anchor="ctr">
-                    <a:lnB w="9525" cap="flat" cmpd="sng" algn="ctr">
+                    <a:lnL w="12700" cap="flat" cmpd="sng" algn="ctr">
                       <a:solidFill>
                         <a:srgbClr val="232E3E"/>
                       </a:solidFill>
+                    </a:lnL>
+                    <a:lnR w="12700" cap="flat" cmpd="sng" algn="ctr">
+                      <a:solidFill>
+                        <a:srgbClr val="232E3E"/>
+                      </a:solidFill>
+                    </a:lnR>
+                    <a:lnT w="12700" cap="flat" cmpd="sng" algn="ctr">
+                      <a:solidFill>
+                        <a:srgbClr val="232E3E"/>
+                      </a:solidFill>
+                    </a:lnT>
+                    <a:lnB w="12700" cap="flat" cmpd="sng" algn="ctr">
+                      <a:solidFill>
+                        <a:srgbClr val="232E3E"/>
+                      </a:solidFill>
                     </a:lnB>
-                    <a:lnT w="9525" cap="flat" cmpd="sng" algn="ctr">
-                      <a:solidFill>
-                        <a:srgbClr val="232E3E"/>
-                      </a:solidFill>
-                    </a:lnT>
-                    <a:lnR w="9525" cap="flat" cmpd="sng" algn="ctr">
-                      <a:solidFill>
-                        <a:srgbClr val="232E3E"/>
-                      </a:solidFill>
-                    </a:lnR>
-                    <a:lnL w="9525" cap="flat" cmpd="sng" algn="ctr">
-                      <a:solidFill>
-                        <a:srgbClr val="232E3E"/>
-                      </a:solidFill>
-                    </a:lnL>
                     <a:solidFill>
                       <a:srgbClr val="232E3E"/>
                     </a:solidFill>
@@ -8870,26 +8890,26 @@
                     </a:p>
                   </a:txBody>
                   <a:tcPr marL="82296" marR="82296" marT="50292" marB="50292" anchor="ctr">
-                    <a:lnB w="9525" cap="flat" cmpd="sng" algn="ctr">
+                    <a:lnL w="12700" cap="flat" cmpd="sng" algn="ctr">
                       <a:solidFill>
                         <a:srgbClr val="232E3E"/>
                       </a:solidFill>
+                    </a:lnL>
+                    <a:lnR w="12700" cap="flat" cmpd="sng" algn="ctr">
+                      <a:solidFill>
+                        <a:srgbClr val="232E3E"/>
+                      </a:solidFill>
+                    </a:lnR>
+                    <a:lnT w="12700" cap="flat" cmpd="sng" algn="ctr">
+                      <a:solidFill>
+                        <a:srgbClr val="232E3E"/>
+                      </a:solidFill>
+                    </a:lnT>
+                    <a:lnB w="12700" cap="flat" cmpd="sng" algn="ctr">
+                      <a:solidFill>
+                        <a:srgbClr val="232E3E"/>
+                      </a:solidFill>
                     </a:lnB>
-                    <a:lnT w="9525" cap="flat" cmpd="sng" algn="ctr">
-                      <a:solidFill>
-                        <a:srgbClr val="232E3E"/>
-                      </a:solidFill>
-                    </a:lnT>
-                    <a:lnR w="9525" cap="flat" cmpd="sng" algn="ctr">
-                      <a:solidFill>
-                        <a:srgbClr val="232E3E"/>
-                      </a:solidFill>
-                    </a:lnR>
-                    <a:lnL w="9525" cap="flat" cmpd="sng" algn="ctr">
-                      <a:solidFill>
-                        <a:srgbClr val="232E3E"/>
-                      </a:solidFill>
-                    </a:lnL>
                     <a:solidFill>
                       <a:srgbClr val="232E3E"/>
                     </a:solidFill>
@@ -8917,26 +8937,26 @@
                     </a:p>
                   </a:txBody>
                   <a:tcPr marL="82296" marR="82296" marT="50292" marB="50292" anchor="ctr">
-                    <a:lnB w="9525" cap="flat" cmpd="sng" algn="ctr">
+                    <a:lnL w="12700" cap="flat" cmpd="sng" algn="ctr">
                       <a:solidFill>
                         <a:srgbClr val="232E3E"/>
                       </a:solidFill>
+                    </a:lnL>
+                    <a:lnR w="12700" cap="flat" cmpd="sng" algn="ctr">
+                      <a:solidFill>
+                        <a:srgbClr val="232E3E"/>
+                      </a:solidFill>
+                    </a:lnR>
+                    <a:lnT w="12700" cap="flat" cmpd="sng" algn="ctr">
+                      <a:solidFill>
+                        <a:srgbClr val="232E3E"/>
+                      </a:solidFill>
+                    </a:lnT>
+                    <a:lnB w="12700" cap="flat" cmpd="sng" algn="ctr">
+                      <a:solidFill>
+                        <a:srgbClr val="232E3E"/>
+                      </a:solidFill>
                     </a:lnB>
-                    <a:lnT w="9525" cap="flat" cmpd="sng" algn="ctr">
-                      <a:solidFill>
-                        <a:srgbClr val="232E3E"/>
-                      </a:solidFill>
-                    </a:lnT>
-                    <a:lnR w="9525" cap="flat" cmpd="sng" algn="ctr">
-                      <a:solidFill>
-                        <a:srgbClr val="232E3E"/>
-                      </a:solidFill>
-                    </a:lnR>
-                    <a:lnL w="9525" cap="flat" cmpd="sng" algn="ctr">
-                      <a:solidFill>
-                        <a:srgbClr val="232E3E"/>
-                      </a:solidFill>
-                    </a:lnL>
                     <a:solidFill>
                       <a:srgbClr val="232E3E"/>
                     </a:solidFill>
@@ -8964,26 +8984,26 @@
                     </a:p>
                   </a:txBody>
                   <a:tcPr marL="82296" marR="82296" marT="50292" marB="50292" anchor="ctr">
-                    <a:lnB w="9525" cap="flat" cmpd="sng" algn="ctr">
+                    <a:lnL w="12700" cap="flat" cmpd="sng" algn="ctr">
                       <a:solidFill>
                         <a:srgbClr val="232E3E"/>
                       </a:solidFill>
+                    </a:lnL>
+                    <a:lnR w="12700" cap="flat" cmpd="sng" algn="ctr">
+                      <a:solidFill>
+                        <a:srgbClr val="232E3E"/>
+                      </a:solidFill>
+                    </a:lnR>
+                    <a:lnT w="12700" cap="flat" cmpd="sng" algn="ctr">
+                      <a:solidFill>
+                        <a:srgbClr val="232E3E"/>
+                      </a:solidFill>
+                    </a:lnT>
+                    <a:lnB w="12700" cap="flat" cmpd="sng" algn="ctr">
+                      <a:solidFill>
+                        <a:srgbClr val="232E3E"/>
+                      </a:solidFill>
                     </a:lnB>
-                    <a:lnT w="9525" cap="flat" cmpd="sng" algn="ctr">
-                      <a:solidFill>
-                        <a:srgbClr val="232E3E"/>
-                      </a:solidFill>
-                    </a:lnT>
-                    <a:lnR w="9525" cap="flat" cmpd="sng" algn="ctr">
-                      <a:solidFill>
-                        <a:srgbClr val="232E3E"/>
-                      </a:solidFill>
-                    </a:lnR>
-                    <a:lnL w="9525" cap="flat" cmpd="sng" algn="ctr">
-                      <a:solidFill>
-                        <a:srgbClr val="232E3E"/>
-                      </a:solidFill>
-                    </a:lnL>
                     <a:solidFill>
                       <a:srgbClr val="232E3E"/>
                     </a:solidFill>
@@ -9013,26 +9033,26 @@
                     </a:p>
                   </a:txBody>
                   <a:tcPr marL="82296" marR="82296" marT="50292" marB="50292" anchor="ctr">
-                    <a:lnR w="9525" cap="flat" cmpd="sng" algn="ctr">
-                      <a:solidFill>
-                        <a:srgbClr val="FFFFFF"/>
+                    <a:lnL w="12700" cap="flat" cmpd="sng" algn="ctr">
+                      <a:solidFill>
+                        <a:srgbClr val="C5CEDA"/>
+                      </a:solidFill>
+                    </a:lnL>
+                    <a:lnR w="12700" cap="flat" cmpd="sng" algn="ctr">
+                      <a:solidFill>
+                        <a:srgbClr val="E3E8EE"/>
                       </a:solidFill>
                     </a:lnR>
-                    <a:lnL w="9525" cap="flat" cmpd="sng" algn="ctr">
-                      <a:solidFill>
-                        <a:srgbClr val="FFFFFF"/>
-                      </a:solidFill>
-                    </a:lnL>
-                    <a:lnB w="9525" cap="flat" cmpd="sng" algn="ctr">
-                      <a:solidFill>
-                        <a:srgbClr val="DCE2E9"/>
+                    <a:lnT w="12700" cap="flat" cmpd="sng" algn="ctr">
+                      <a:solidFill>
+                        <a:srgbClr val="C5CEDA"/>
+                      </a:solidFill>
+                    </a:lnT>
+                    <a:lnB w="12700" cap="flat" cmpd="sng" algn="ctr">
+                      <a:solidFill>
+                        <a:srgbClr val="C5CEDA"/>
                       </a:solidFill>
                     </a:lnB>
-                    <a:lnT w="9525" cap="flat" cmpd="sng" algn="ctr">
-                      <a:solidFill>
-                        <a:srgbClr val="DCE2E9"/>
-                      </a:solidFill>
-                    </a:lnT>
                     <a:solidFill>
                       <a:srgbClr val="FFFFFF"/>
                     </a:solidFill>
@@ -9060,26 +9080,26 @@
                     </a:p>
                   </a:txBody>
                   <a:tcPr marL="82296" marR="82296" marT="50292" marB="50292" anchor="ctr">
-                    <a:lnR w="9525" cap="flat" cmpd="sng" algn="ctr">
-                      <a:solidFill>
-                        <a:srgbClr val="FFFFFF"/>
+                    <a:lnL w="12700" cap="flat" cmpd="sng" algn="ctr">
+                      <a:solidFill>
+                        <a:srgbClr val="E3E8EE"/>
+                      </a:solidFill>
+                    </a:lnL>
+                    <a:lnR w="12700" cap="flat" cmpd="sng" algn="ctr">
+                      <a:solidFill>
+                        <a:srgbClr val="E3E8EE"/>
                       </a:solidFill>
                     </a:lnR>
-                    <a:lnL w="9525" cap="flat" cmpd="sng" algn="ctr">
-                      <a:solidFill>
-                        <a:srgbClr val="FFFFFF"/>
-                      </a:solidFill>
-                    </a:lnL>
-                    <a:lnB w="9525" cap="flat" cmpd="sng" algn="ctr">
-                      <a:solidFill>
-                        <a:srgbClr val="DCE2E9"/>
+                    <a:lnT w="12700" cap="flat" cmpd="sng" algn="ctr">
+                      <a:solidFill>
+                        <a:srgbClr val="C5CEDA"/>
+                      </a:solidFill>
+                    </a:lnT>
+                    <a:lnB w="12700" cap="flat" cmpd="sng" algn="ctr">
+                      <a:solidFill>
+                        <a:srgbClr val="C5CEDA"/>
                       </a:solidFill>
                     </a:lnB>
-                    <a:lnT w="9525" cap="flat" cmpd="sng" algn="ctr">
-                      <a:solidFill>
-                        <a:srgbClr val="DCE2E9"/>
-                      </a:solidFill>
-                    </a:lnT>
                     <a:solidFill>
                       <a:srgbClr val="FFFFFF"/>
                     </a:solidFill>
@@ -9107,26 +9127,26 @@
                     </a:p>
                   </a:txBody>
                   <a:tcPr marL="82296" marR="82296" marT="50292" marB="50292" anchor="ctr">
-                    <a:lnR w="9525" cap="flat" cmpd="sng" algn="ctr">
-                      <a:solidFill>
-                        <a:srgbClr val="FFFFFF"/>
+                    <a:lnL w="12700" cap="flat" cmpd="sng" algn="ctr">
+                      <a:solidFill>
+                        <a:srgbClr val="E3E8EE"/>
+                      </a:solidFill>
+                    </a:lnL>
+                    <a:lnR w="12700" cap="flat" cmpd="sng" algn="ctr">
+                      <a:solidFill>
+                        <a:srgbClr val="E3E8EE"/>
                       </a:solidFill>
                     </a:lnR>
-                    <a:lnL w="9525" cap="flat" cmpd="sng" algn="ctr">
-                      <a:solidFill>
-                        <a:srgbClr val="FFFFFF"/>
-                      </a:solidFill>
-                    </a:lnL>
-                    <a:lnB w="9525" cap="flat" cmpd="sng" algn="ctr">
-                      <a:solidFill>
-                        <a:srgbClr val="DCE2E9"/>
+                    <a:lnT w="12700" cap="flat" cmpd="sng" algn="ctr">
+                      <a:solidFill>
+                        <a:srgbClr val="C5CEDA"/>
+                      </a:solidFill>
+                    </a:lnT>
+                    <a:lnB w="12700" cap="flat" cmpd="sng" algn="ctr">
+                      <a:solidFill>
+                        <a:srgbClr val="C5CEDA"/>
                       </a:solidFill>
                     </a:lnB>
-                    <a:lnT w="9525" cap="flat" cmpd="sng" algn="ctr">
-                      <a:solidFill>
-                        <a:srgbClr val="DCE2E9"/>
-                      </a:solidFill>
-                    </a:lnT>
                     <a:solidFill>
                       <a:srgbClr val="FFFFFF"/>
                     </a:solidFill>
@@ -9154,26 +9174,26 @@
                     </a:p>
                   </a:txBody>
                   <a:tcPr marL="82296" marR="82296" marT="50292" marB="50292" anchor="ctr">
-                    <a:lnR w="9525" cap="flat" cmpd="sng" algn="ctr">
-                      <a:solidFill>
-                        <a:srgbClr val="FFFFFF"/>
+                    <a:lnL w="12700" cap="flat" cmpd="sng" algn="ctr">
+                      <a:solidFill>
+                        <a:srgbClr val="E3E8EE"/>
+                      </a:solidFill>
+                    </a:lnL>
+                    <a:lnR w="12700" cap="flat" cmpd="sng" algn="ctr">
+                      <a:solidFill>
+                        <a:srgbClr val="E3E8EE"/>
                       </a:solidFill>
                     </a:lnR>
-                    <a:lnL w="9525" cap="flat" cmpd="sng" algn="ctr">
-                      <a:solidFill>
-                        <a:srgbClr val="FFFFFF"/>
-                      </a:solidFill>
-                    </a:lnL>
-                    <a:lnB w="9525" cap="flat" cmpd="sng" algn="ctr">
-                      <a:solidFill>
-                        <a:srgbClr val="DCE2E9"/>
+                    <a:lnT w="12700" cap="flat" cmpd="sng" algn="ctr">
+                      <a:solidFill>
+                        <a:srgbClr val="C5CEDA"/>
+                      </a:solidFill>
+                    </a:lnT>
+                    <a:lnB w="12700" cap="flat" cmpd="sng" algn="ctr">
+                      <a:solidFill>
+                        <a:srgbClr val="C5CEDA"/>
                       </a:solidFill>
                     </a:lnB>
-                    <a:lnT w="9525" cap="flat" cmpd="sng" algn="ctr">
-                      <a:solidFill>
-                        <a:srgbClr val="DCE2E9"/>
-                      </a:solidFill>
-                    </a:lnT>
                     <a:solidFill>
                       <a:srgbClr val="FFFFFF"/>
                     </a:solidFill>
@@ -9201,26 +9221,26 @@
                     </a:p>
                   </a:txBody>
                   <a:tcPr marL="82296" marR="82296" marT="50292" marB="50292" anchor="ctr">
-                    <a:lnR w="9525" cap="flat" cmpd="sng" algn="ctr">
-                      <a:solidFill>
-                        <a:srgbClr val="FFFFFF"/>
+                    <a:lnL w="12700" cap="flat" cmpd="sng" algn="ctr">
+                      <a:solidFill>
+                        <a:srgbClr val="E3E8EE"/>
+                      </a:solidFill>
+                    </a:lnL>
+                    <a:lnR w="12700" cap="flat" cmpd="sng" algn="ctr">
+                      <a:solidFill>
+                        <a:srgbClr val="E3E8EE"/>
                       </a:solidFill>
                     </a:lnR>
-                    <a:lnL w="9525" cap="flat" cmpd="sng" algn="ctr">
-                      <a:solidFill>
-                        <a:srgbClr val="FFFFFF"/>
-                      </a:solidFill>
-                    </a:lnL>
-                    <a:lnB w="9525" cap="flat" cmpd="sng" algn="ctr">
-                      <a:solidFill>
-                        <a:srgbClr val="DCE2E9"/>
+                    <a:lnT w="12700" cap="flat" cmpd="sng" algn="ctr">
+                      <a:solidFill>
+                        <a:srgbClr val="C5CEDA"/>
+                      </a:solidFill>
+                    </a:lnT>
+                    <a:lnB w="12700" cap="flat" cmpd="sng" algn="ctr">
+                      <a:solidFill>
+                        <a:srgbClr val="C5CEDA"/>
                       </a:solidFill>
                     </a:lnB>
-                    <a:lnT w="9525" cap="flat" cmpd="sng" algn="ctr">
-                      <a:solidFill>
-                        <a:srgbClr val="DCE2E9"/>
-                      </a:solidFill>
-                    </a:lnT>
                     <a:solidFill>
                       <a:srgbClr val="FFFFFF"/>
                     </a:solidFill>
@@ -9248,26 +9268,26 @@
                     </a:p>
                   </a:txBody>
                   <a:tcPr marL="82296" marR="82296" marT="50292" marB="50292" anchor="ctr">
-                    <a:lnR w="9525" cap="flat" cmpd="sng" algn="ctr">
-                      <a:solidFill>
-                        <a:srgbClr val="FFFFFF"/>
+                    <a:lnL w="12700" cap="flat" cmpd="sng" algn="ctr">
+                      <a:solidFill>
+                        <a:srgbClr val="E3E8EE"/>
+                      </a:solidFill>
+                    </a:lnL>
+                    <a:lnR w="12700" cap="flat" cmpd="sng" algn="ctr">
+                      <a:solidFill>
+                        <a:srgbClr val="C5CEDA"/>
                       </a:solidFill>
                     </a:lnR>
-                    <a:lnL w="9525" cap="flat" cmpd="sng" algn="ctr">
-                      <a:solidFill>
-                        <a:srgbClr val="FFFFFF"/>
-                      </a:solidFill>
-                    </a:lnL>
-                    <a:lnB w="9525" cap="flat" cmpd="sng" algn="ctr">
-                      <a:solidFill>
-                        <a:srgbClr val="DCE2E9"/>
+                    <a:lnT w="12700" cap="flat" cmpd="sng" algn="ctr">
+                      <a:solidFill>
+                        <a:srgbClr val="C5CEDA"/>
+                      </a:solidFill>
+                    </a:lnT>
+                    <a:lnB w="12700" cap="flat" cmpd="sng" algn="ctr">
+                      <a:solidFill>
+                        <a:srgbClr val="C5CEDA"/>
                       </a:solidFill>
                     </a:lnB>
-                    <a:lnT w="9525" cap="flat" cmpd="sng" algn="ctr">
-                      <a:solidFill>
-                        <a:srgbClr val="DCE2E9"/>
-                      </a:solidFill>
-                    </a:lnT>
                     <a:solidFill>
                       <a:srgbClr val="FFFFFF"/>
                     </a:solidFill>
@@ -9297,26 +9317,26 @@
                     </a:p>
                   </a:txBody>
                   <a:tcPr marL="82296" marR="82296" marT="50292" marB="50292" anchor="ctr">
-                    <a:lnR w="9525" cap="flat" cmpd="sng" algn="ctr">
-                      <a:solidFill>
-                        <a:srgbClr val="F6F8FA"/>
+                    <a:lnL w="12700" cap="flat" cmpd="sng" algn="ctr">
+                      <a:solidFill>
+                        <a:srgbClr val="C5CEDA"/>
+                      </a:solidFill>
+                    </a:lnL>
+                    <a:lnR w="12700" cap="flat" cmpd="sng" algn="ctr">
+                      <a:solidFill>
+                        <a:srgbClr val="E3E8EE"/>
                       </a:solidFill>
                     </a:lnR>
-                    <a:lnL w="9525" cap="flat" cmpd="sng" algn="ctr">
-                      <a:solidFill>
-                        <a:srgbClr val="F6F8FA"/>
-                      </a:solidFill>
-                    </a:lnL>
-                    <a:lnB w="9525" cap="flat" cmpd="sng" algn="ctr">
-                      <a:solidFill>
-                        <a:srgbClr val="DCE2E9"/>
+                    <a:lnT w="12700" cap="flat" cmpd="sng" algn="ctr">
+                      <a:solidFill>
+                        <a:srgbClr val="C5CEDA"/>
+                      </a:solidFill>
+                    </a:lnT>
+                    <a:lnB w="12700" cap="flat" cmpd="sng" algn="ctr">
+                      <a:solidFill>
+                        <a:srgbClr val="C5CEDA"/>
                       </a:solidFill>
                     </a:lnB>
-                    <a:lnT w="9525" cap="flat" cmpd="sng" algn="ctr">
-                      <a:solidFill>
-                        <a:srgbClr val="DCE2E9"/>
-                      </a:solidFill>
-                    </a:lnT>
                     <a:solidFill>
                       <a:srgbClr val="F6F8FA"/>
                     </a:solidFill>
@@ -9344,26 +9364,26 @@
                     </a:p>
                   </a:txBody>
                   <a:tcPr marL="82296" marR="82296" marT="50292" marB="50292" anchor="ctr">
-                    <a:lnR w="9525" cap="flat" cmpd="sng" algn="ctr">
-                      <a:solidFill>
-                        <a:srgbClr val="F6F8FA"/>
+                    <a:lnL w="12700" cap="flat" cmpd="sng" algn="ctr">
+                      <a:solidFill>
+                        <a:srgbClr val="E3E8EE"/>
+                      </a:solidFill>
+                    </a:lnL>
+                    <a:lnR w="12700" cap="flat" cmpd="sng" algn="ctr">
+                      <a:solidFill>
+                        <a:srgbClr val="E3E8EE"/>
                       </a:solidFill>
                     </a:lnR>
-                    <a:lnL w="9525" cap="flat" cmpd="sng" algn="ctr">
-                      <a:solidFill>
-                        <a:srgbClr val="F6F8FA"/>
-                      </a:solidFill>
-                    </a:lnL>
-                    <a:lnB w="9525" cap="flat" cmpd="sng" algn="ctr">
-                      <a:solidFill>
-                        <a:srgbClr val="DCE2E9"/>
+                    <a:lnT w="12700" cap="flat" cmpd="sng" algn="ctr">
+                      <a:solidFill>
+                        <a:srgbClr val="C5CEDA"/>
+                      </a:solidFill>
+                    </a:lnT>
+                    <a:lnB w="12700" cap="flat" cmpd="sng" algn="ctr">
+                      <a:solidFill>
+                        <a:srgbClr val="C5CEDA"/>
                       </a:solidFill>
                     </a:lnB>
-                    <a:lnT w="9525" cap="flat" cmpd="sng" algn="ctr">
-                      <a:solidFill>
-                        <a:srgbClr val="DCE2E9"/>
-                      </a:solidFill>
-                    </a:lnT>
                     <a:solidFill>
                       <a:srgbClr val="F6F8FA"/>
                     </a:solidFill>
@@ -9391,26 +9411,26 @@
                     </a:p>
                   </a:txBody>
                   <a:tcPr marL="82296" marR="82296" marT="50292" marB="50292" anchor="ctr">
-                    <a:lnR w="9525" cap="flat" cmpd="sng" algn="ctr">
-                      <a:solidFill>
-                        <a:srgbClr val="F6F8FA"/>
+                    <a:lnL w="12700" cap="flat" cmpd="sng" algn="ctr">
+                      <a:solidFill>
+                        <a:srgbClr val="E3E8EE"/>
+                      </a:solidFill>
+                    </a:lnL>
+                    <a:lnR w="12700" cap="flat" cmpd="sng" algn="ctr">
+                      <a:solidFill>
+                        <a:srgbClr val="E3E8EE"/>
                       </a:solidFill>
                     </a:lnR>
-                    <a:lnL w="9525" cap="flat" cmpd="sng" algn="ctr">
-                      <a:solidFill>
-                        <a:srgbClr val="F6F8FA"/>
-                      </a:solidFill>
-                    </a:lnL>
-                    <a:lnB w="9525" cap="flat" cmpd="sng" algn="ctr">
-                      <a:solidFill>
-                        <a:srgbClr val="DCE2E9"/>
+                    <a:lnT w="12700" cap="flat" cmpd="sng" algn="ctr">
+                      <a:solidFill>
+                        <a:srgbClr val="C5CEDA"/>
+                      </a:solidFill>
+                    </a:lnT>
+                    <a:lnB w="12700" cap="flat" cmpd="sng" algn="ctr">
+                      <a:solidFill>
+                        <a:srgbClr val="C5CEDA"/>
                       </a:solidFill>
                     </a:lnB>
-                    <a:lnT w="9525" cap="flat" cmpd="sng" algn="ctr">
-                      <a:solidFill>
-                        <a:srgbClr val="DCE2E9"/>
-                      </a:solidFill>
-                    </a:lnT>
                     <a:solidFill>
                       <a:srgbClr val="F6F8FA"/>
                     </a:solidFill>
@@ -9438,26 +9458,26 @@
                     </a:p>
                   </a:txBody>
                   <a:tcPr marL="82296" marR="82296" marT="50292" marB="50292" anchor="ctr">
-                    <a:lnR w="9525" cap="flat" cmpd="sng" algn="ctr">
-                      <a:solidFill>
-                        <a:srgbClr val="F6F8FA"/>
+                    <a:lnL w="12700" cap="flat" cmpd="sng" algn="ctr">
+                      <a:solidFill>
+                        <a:srgbClr val="E3E8EE"/>
+                      </a:solidFill>
+                    </a:lnL>
+                    <a:lnR w="12700" cap="flat" cmpd="sng" algn="ctr">
+                      <a:solidFill>
+                        <a:srgbClr val="E3E8EE"/>
                       </a:solidFill>
                     </a:lnR>
-                    <a:lnL w="9525" cap="flat" cmpd="sng" algn="ctr">
-                      <a:solidFill>
-                        <a:srgbClr val="F6F8FA"/>
-                      </a:solidFill>
-                    </a:lnL>
-                    <a:lnB w="9525" cap="flat" cmpd="sng" algn="ctr">
-                      <a:solidFill>
-                        <a:srgbClr val="DCE2E9"/>
+                    <a:lnT w="12700" cap="flat" cmpd="sng" algn="ctr">
+                      <a:solidFill>
+                        <a:srgbClr val="C5CEDA"/>
+                      </a:solidFill>
+                    </a:lnT>
+                    <a:lnB w="12700" cap="flat" cmpd="sng" algn="ctr">
+                      <a:solidFill>
+                        <a:srgbClr val="C5CEDA"/>
                       </a:solidFill>
                     </a:lnB>
-                    <a:lnT w="9525" cap="flat" cmpd="sng" algn="ctr">
-                      <a:solidFill>
-                        <a:srgbClr val="DCE2E9"/>
-                      </a:solidFill>
-                    </a:lnT>
                     <a:solidFill>
                       <a:srgbClr val="F6F8FA"/>
                     </a:solidFill>
@@ -9485,26 +9505,26 @@
                     </a:p>
                   </a:txBody>
                   <a:tcPr marL="82296" marR="82296" marT="50292" marB="50292" anchor="ctr">
-                    <a:lnR w="9525" cap="flat" cmpd="sng" algn="ctr">
-                      <a:solidFill>
-                        <a:srgbClr val="F6F8FA"/>
+                    <a:lnL w="12700" cap="flat" cmpd="sng" algn="ctr">
+                      <a:solidFill>
+                        <a:srgbClr val="E3E8EE"/>
+                      </a:solidFill>
+                    </a:lnL>
+                    <a:lnR w="12700" cap="flat" cmpd="sng" algn="ctr">
+                      <a:solidFill>
+                        <a:srgbClr val="E3E8EE"/>
                       </a:solidFill>
                     </a:lnR>
-                    <a:lnL w="9525" cap="flat" cmpd="sng" algn="ctr">
-                      <a:solidFill>
-                        <a:srgbClr val="F6F8FA"/>
-                      </a:solidFill>
-                    </a:lnL>
-                    <a:lnB w="9525" cap="flat" cmpd="sng" algn="ctr">
-                      <a:solidFill>
-                        <a:srgbClr val="DCE2E9"/>
+                    <a:lnT w="12700" cap="flat" cmpd="sng" algn="ctr">
+                      <a:solidFill>
+                        <a:srgbClr val="C5CEDA"/>
+                      </a:solidFill>
+                    </a:lnT>
+                    <a:lnB w="12700" cap="flat" cmpd="sng" algn="ctr">
+                      <a:solidFill>
+                        <a:srgbClr val="C5CEDA"/>
                       </a:solidFill>
                     </a:lnB>
-                    <a:lnT w="9525" cap="flat" cmpd="sng" algn="ctr">
-                      <a:solidFill>
-                        <a:srgbClr val="DCE2E9"/>
-                      </a:solidFill>
-                    </a:lnT>
                     <a:solidFill>
                       <a:srgbClr val="F6F8FA"/>
                     </a:solidFill>
@@ -9532,26 +9552,26 @@
                     </a:p>
                   </a:txBody>
                   <a:tcPr marL="82296" marR="82296" marT="50292" marB="50292" anchor="ctr">
-                    <a:lnR w="9525" cap="flat" cmpd="sng" algn="ctr">
-                      <a:solidFill>
-                        <a:srgbClr val="F6F8FA"/>
+                    <a:lnL w="12700" cap="flat" cmpd="sng" algn="ctr">
+                      <a:solidFill>
+                        <a:srgbClr val="E3E8EE"/>
+                      </a:solidFill>
+                    </a:lnL>
+                    <a:lnR w="12700" cap="flat" cmpd="sng" algn="ctr">
+                      <a:solidFill>
+                        <a:srgbClr val="C5CEDA"/>
                       </a:solidFill>
                     </a:lnR>
-                    <a:lnL w="9525" cap="flat" cmpd="sng" algn="ctr">
-                      <a:solidFill>
-                        <a:srgbClr val="F6F8FA"/>
-                      </a:solidFill>
-                    </a:lnL>
-                    <a:lnB w="9525" cap="flat" cmpd="sng" algn="ctr">
-                      <a:solidFill>
-                        <a:srgbClr val="DCE2E9"/>
+                    <a:lnT w="12700" cap="flat" cmpd="sng" algn="ctr">
+                      <a:solidFill>
+                        <a:srgbClr val="C5CEDA"/>
+                      </a:solidFill>
+                    </a:lnT>
+                    <a:lnB w="12700" cap="flat" cmpd="sng" algn="ctr">
+                      <a:solidFill>
+                        <a:srgbClr val="C5CEDA"/>
                       </a:solidFill>
                     </a:lnB>
-                    <a:lnT w="9525" cap="flat" cmpd="sng" algn="ctr">
-                      <a:solidFill>
-                        <a:srgbClr val="DCE2E9"/>
-                      </a:solidFill>
-                    </a:lnT>
                     <a:solidFill>
                       <a:srgbClr val="F6F8FA"/>
                     </a:solidFill>
@@ -9581,26 +9601,26 @@
                     </a:p>
                   </a:txBody>
                   <a:tcPr marL="82296" marR="82296" marT="50292" marB="50292" anchor="ctr">
-                    <a:lnR w="9525" cap="flat" cmpd="sng" algn="ctr">
-                      <a:solidFill>
-                        <a:srgbClr val="FFFFFF"/>
+                    <a:lnL w="12700" cap="flat" cmpd="sng" algn="ctr">
+                      <a:solidFill>
+                        <a:srgbClr val="C5CEDA"/>
+                      </a:solidFill>
+                    </a:lnL>
+                    <a:lnR w="12700" cap="flat" cmpd="sng" algn="ctr">
+                      <a:solidFill>
+                        <a:srgbClr val="E3E8EE"/>
                       </a:solidFill>
                     </a:lnR>
-                    <a:lnL w="9525" cap="flat" cmpd="sng" algn="ctr">
-                      <a:solidFill>
-                        <a:srgbClr val="FFFFFF"/>
-                      </a:solidFill>
-                    </a:lnL>
-                    <a:lnB w="9525" cap="flat" cmpd="sng" algn="ctr">
-                      <a:solidFill>
-                        <a:srgbClr val="DCE2E9"/>
+                    <a:lnT w="12700" cap="flat" cmpd="sng" algn="ctr">
+                      <a:solidFill>
+                        <a:srgbClr val="C5CEDA"/>
+                      </a:solidFill>
+                    </a:lnT>
+                    <a:lnB w="12700" cap="flat" cmpd="sng" algn="ctr">
+                      <a:solidFill>
+                        <a:srgbClr val="C5CEDA"/>
                       </a:solidFill>
                     </a:lnB>
-                    <a:lnT w="9525" cap="flat" cmpd="sng" algn="ctr">
-                      <a:solidFill>
-                        <a:srgbClr val="DCE2E9"/>
-                      </a:solidFill>
-                    </a:lnT>
                     <a:solidFill>
                       <a:srgbClr val="FFFFFF"/>
                     </a:solidFill>
@@ -9628,26 +9648,26 @@
                     </a:p>
                   </a:txBody>
                   <a:tcPr marL="82296" marR="82296" marT="50292" marB="50292" anchor="ctr">
-                    <a:lnR w="9525" cap="flat" cmpd="sng" algn="ctr">
-                      <a:solidFill>
-                        <a:srgbClr val="FFFFFF"/>
+                    <a:lnL w="12700" cap="flat" cmpd="sng" algn="ctr">
+                      <a:solidFill>
+                        <a:srgbClr val="E3E8EE"/>
+                      </a:solidFill>
+                    </a:lnL>
+                    <a:lnR w="12700" cap="flat" cmpd="sng" algn="ctr">
+                      <a:solidFill>
+                        <a:srgbClr val="E3E8EE"/>
                       </a:solidFill>
                     </a:lnR>
-                    <a:lnL w="9525" cap="flat" cmpd="sng" algn="ctr">
-                      <a:solidFill>
-                        <a:srgbClr val="FFFFFF"/>
-                      </a:solidFill>
-                    </a:lnL>
-                    <a:lnB w="9525" cap="flat" cmpd="sng" algn="ctr">
-                      <a:solidFill>
-                        <a:srgbClr val="DCE2E9"/>
+                    <a:lnT w="12700" cap="flat" cmpd="sng" algn="ctr">
+                      <a:solidFill>
+                        <a:srgbClr val="C5CEDA"/>
+                      </a:solidFill>
+                    </a:lnT>
+                    <a:lnB w="12700" cap="flat" cmpd="sng" algn="ctr">
+                      <a:solidFill>
+                        <a:srgbClr val="C5CEDA"/>
                       </a:solidFill>
                     </a:lnB>
-                    <a:lnT w="9525" cap="flat" cmpd="sng" algn="ctr">
-                      <a:solidFill>
-                        <a:srgbClr val="DCE2E9"/>
-                      </a:solidFill>
-                    </a:lnT>
                     <a:solidFill>
                       <a:srgbClr val="FFFFFF"/>
                     </a:solidFill>
@@ -9675,26 +9695,26 @@
                     </a:p>
                   </a:txBody>
                   <a:tcPr marL="82296" marR="82296" marT="50292" marB="50292" anchor="ctr">
-                    <a:lnR w="9525" cap="flat" cmpd="sng" algn="ctr">
-                      <a:solidFill>
-                        <a:srgbClr val="FFFFFF"/>
+                    <a:lnL w="12700" cap="flat" cmpd="sng" algn="ctr">
+                      <a:solidFill>
+                        <a:srgbClr val="E3E8EE"/>
+                      </a:solidFill>
+                    </a:lnL>
+                    <a:lnR w="12700" cap="flat" cmpd="sng" algn="ctr">
+                      <a:solidFill>
+                        <a:srgbClr val="E3E8EE"/>
                       </a:solidFill>
                     </a:lnR>
-                    <a:lnL w="9525" cap="flat" cmpd="sng" algn="ctr">
-                      <a:solidFill>
-                        <a:srgbClr val="FFFFFF"/>
-                      </a:solidFill>
-                    </a:lnL>
-                    <a:lnB w="9525" cap="flat" cmpd="sng" algn="ctr">
-                      <a:solidFill>
-                        <a:srgbClr val="DCE2E9"/>
+                    <a:lnT w="12700" cap="flat" cmpd="sng" algn="ctr">
+                      <a:solidFill>
+                        <a:srgbClr val="C5CEDA"/>
+                      </a:solidFill>
+                    </a:lnT>
+                    <a:lnB w="12700" cap="flat" cmpd="sng" algn="ctr">
+                      <a:solidFill>
+                        <a:srgbClr val="C5CEDA"/>
                       </a:solidFill>
                     </a:lnB>
-                    <a:lnT w="9525" cap="flat" cmpd="sng" algn="ctr">
-                      <a:solidFill>
-                        <a:srgbClr val="DCE2E9"/>
-                      </a:solidFill>
-                    </a:lnT>
                     <a:solidFill>
                       <a:srgbClr val="FFFFFF"/>
                     </a:solidFill>
@@ -9722,26 +9742,26 @@
                     </a:p>
                   </a:txBody>
                   <a:tcPr marL="82296" marR="82296" marT="50292" marB="50292" anchor="ctr">
-                    <a:lnR w="9525" cap="flat" cmpd="sng" algn="ctr">
-                      <a:solidFill>
-                        <a:srgbClr val="FFFFFF"/>
+                    <a:lnL w="12700" cap="flat" cmpd="sng" algn="ctr">
+                      <a:solidFill>
+                        <a:srgbClr val="E3E8EE"/>
+                      </a:solidFill>
+                    </a:lnL>
+                    <a:lnR w="12700" cap="flat" cmpd="sng" algn="ctr">
+                      <a:solidFill>
+                        <a:srgbClr val="E3E8EE"/>
                       </a:solidFill>
                     </a:lnR>
-                    <a:lnL w="9525" cap="flat" cmpd="sng" algn="ctr">
-                      <a:solidFill>
-                        <a:srgbClr val="FFFFFF"/>
-                      </a:solidFill>
-                    </a:lnL>
-                    <a:lnB w="9525" cap="flat" cmpd="sng" algn="ctr">
-                      <a:solidFill>
-                        <a:srgbClr val="DCE2E9"/>
+                    <a:lnT w="12700" cap="flat" cmpd="sng" algn="ctr">
+                      <a:solidFill>
+                        <a:srgbClr val="C5CEDA"/>
+                      </a:solidFill>
+                    </a:lnT>
+                    <a:lnB w="12700" cap="flat" cmpd="sng" algn="ctr">
+                      <a:solidFill>
+                        <a:srgbClr val="C5CEDA"/>
                       </a:solidFill>
                     </a:lnB>
-                    <a:lnT w="9525" cap="flat" cmpd="sng" algn="ctr">
-                      <a:solidFill>
-                        <a:srgbClr val="DCE2E9"/>
-                      </a:solidFill>
-                    </a:lnT>
                     <a:solidFill>
                       <a:srgbClr val="FFFFFF"/>
                     </a:solidFill>
@@ -9769,26 +9789,26 @@
                     </a:p>
                   </a:txBody>
                   <a:tcPr marL="82296" marR="82296" marT="50292" marB="50292" anchor="ctr">
-                    <a:lnR w="9525" cap="flat" cmpd="sng" algn="ctr">
-                      <a:solidFill>
-                        <a:srgbClr val="FFFFFF"/>
+                    <a:lnL w="12700" cap="flat" cmpd="sng" algn="ctr">
+                      <a:solidFill>
+                        <a:srgbClr val="E3E8EE"/>
+                      </a:solidFill>
+                    </a:lnL>
+                    <a:lnR w="12700" cap="flat" cmpd="sng" algn="ctr">
+                      <a:solidFill>
+                        <a:srgbClr val="E3E8EE"/>
                       </a:solidFill>
                     </a:lnR>
-                    <a:lnL w="9525" cap="flat" cmpd="sng" algn="ctr">
-                      <a:solidFill>
-                        <a:srgbClr val="FFFFFF"/>
-                      </a:solidFill>
-                    </a:lnL>
-                    <a:lnB w="9525" cap="flat" cmpd="sng" algn="ctr">
-                      <a:solidFill>
-                        <a:srgbClr val="DCE2E9"/>
+                    <a:lnT w="12700" cap="flat" cmpd="sng" algn="ctr">
+                      <a:solidFill>
+                        <a:srgbClr val="C5CEDA"/>
+                      </a:solidFill>
+                    </a:lnT>
+                    <a:lnB w="12700" cap="flat" cmpd="sng" algn="ctr">
+                      <a:solidFill>
+                        <a:srgbClr val="C5CEDA"/>
                       </a:solidFill>
                     </a:lnB>
-                    <a:lnT w="9525" cap="flat" cmpd="sng" algn="ctr">
-                      <a:solidFill>
-                        <a:srgbClr val="DCE2E9"/>
-                      </a:solidFill>
-                    </a:lnT>
                     <a:solidFill>
                       <a:srgbClr val="FFFFFF"/>
                     </a:solidFill>
@@ -9816,26 +9836,26 @@
                     </a:p>
                   </a:txBody>
                   <a:tcPr marL="82296" marR="82296" marT="50292" marB="50292" anchor="ctr">
-                    <a:lnR w="9525" cap="flat" cmpd="sng" algn="ctr">
-                      <a:solidFill>
-                        <a:srgbClr val="FFFFFF"/>
+                    <a:lnL w="12700" cap="flat" cmpd="sng" algn="ctr">
+                      <a:solidFill>
+                        <a:srgbClr val="E3E8EE"/>
+                      </a:solidFill>
+                    </a:lnL>
+                    <a:lnR w="12700" cap="flat" cmpd="sng" algn="ctr">
+                      <a:solidFill>
+                        <a:srgbClr val="C5CEDA"/>
                       </a:solidFill>
                     </a:lnR>
-                    <a:lnL w="9525" cap="flat" cmpd="sng" algn="ctr">
-                      <a:solidFill>
-                        <a:srgbClr val="FFFFFF"/>
-                      </a:solidFill>
-                    </a:lnL>
-                    <a:lnB w="9525" cap="flat" cmpd="sng" algn="ctr">
-                      <a:solidFill>
-                        <a:srgbClr val="DCE2E9"/>
+                    <a:lnT w="12700" cap="flat" cmpd="sng" algn="ctr">
+                      <a:solidFill>
+                        <a:srgbClr val="C5CEDA"/>
+                      </a:solidFill>
+                    </a:lnT>
+                    <a:lnB w="12700" cap="flat" cmpd="sng" algn="ctr">
+                      <a:solidFill>
+                        <a:srgbClr val="C5CEDA"/>
                       </a:solidFill>
                     </a:lnB>
-                    <a:lnT w="9525" cap="flat" cmpd="sng" algn="ctr">
-                      <a:solidFill>
-                        <a:srgbClr val="DCE2E9"/>
-                      </a:solidFill>
-                    </a:lnT>
                     <a:solidFill>
                       <a:srgbClr val="FFFFFF"/>
                     </a:solidFill>
@@ -9865,26 +9885,26 @@
                     </a:p>
                   </a:txBody>
                   <a:tcPr marL="82296" marR="82296" marT="50292" marB="50292" anchor="ctr">
-                    <a:lnR w="9525" cap="flat" cmpd="sng" algn="ctr">
-                      <a:solidFill>
-                        <a:srgbClr val="F6F8FA"/>
+                    <a:lnL w="12700" cap="flat" cmpd="sng" algn="ctr">
+                      <a:solidFill>
+                        <a:srgbClr val="C5CEDA"/>
+                      </a:solidFill>
+                    </a:lnL>
+                    <a:lnR w="12700" cap="flat" cmpd="sng" algn="ctr">
+                      <a:solidFill>
+                        <a:srgbClr val="E3E8EE"/>
                       </a:solidFill>
                     </a:lnR>
-                    <a:lnL w="9525" cap="flat" cmpd="sng" algn="ctr">
-                      <a:solidFill>
-                        <a:srgbClr val="F6F8FA"/>
-                      </a:solidFill>
-                    </a:lnL>
-                    <a:lnB w="9525" cap="flat" cmpd="sng" algn="ctr">
-                      <a:solidFill>
-                        <a:srgbClr val="DCE2E9"/>
+                    <a:lnT w="12700" cap="flat" cmpd="sng" algn="ctr">
+                      <a:solidFill>
+                        <a:srgbClr val="C5CEDA"/>
+                      </a:solidFill>
+                    </a:lnT>
+                    <a:lnB w="15875" cap="flat" cmpd="sng" algn="ctr">
+                      <a:solidFill>
+                        <a:srgbClr val="C5CEDA"/>
                       </a:solidFill>
                     </a:lnB>
-                    <a:lnT w="9525" cap="flat" cmpd="sng" algn="ctr">
-                      <a:solidFill>
-                        <a:srgbClr val="DCE2E9"/>
-                      </a:solidFill>
-                    </a:lnT>
                     <a:solidFill>
                       <a:srgbClr val="F6F8FA"/>
                     </a:solidFill>
@@ -9912,26 +9932,26 @@
                     </a:p>
                   </a:txBody>
                   <a:tcPr marL="82296" marR="82296" marT="50292" marB="50292" anchor="ctr">
-                    <a:lnR w="9525" cap="flat" cmpd="sng" algn="ctr">
-                      <a:solidFill>
-                        <a:srgbClr val="F6F8FA"/>
+                    <a:lnL w="12700" cap="flat" cmpd="sng" algn="ctr">
+                      <a:solidFill>
+                        <a:srgbClr val="E3E8EE"/>
+                      </a:solidFill>
+                    </a:lnL>
+                    <a:lnR w="12700" cap="flat" cmpd="sng" algn="ctr">
+                      <a:solidFill>
+                        <a:srgbClr val="E3E8EE"/>
                       </a:solidFill>
                     </a:lnR>
-                    <a:lnL w="9525" cap="flat" cmpd="sng" algn="ctr">
-                      <a:solidFill>
-                        <a:srgbClr val="F6F8FA"/>
-                      </a:solidFill>
-                    </a:lnL>
-                    <a:lnB w="9525" cap="flat" cmpd="sng" algn="ctr">
-                      <a:solidFill>
-                        <a:srgbClr val="DCE2E9"/>
+                    <a:lnT w="12700" cap="flat" cmpd="sng" algn="ctr">
+                      <a:solidFill>
+                        <a:srgbClr val="C5CEDA"/>
+                      </a:solidFill>
+                    </a:lnT>
+                    <a:lnB w="15875" cap="flat" cmpd="sng" algn="ctr">
+                      <a:solidFill>
+                        <a:srgbClr val="C5CEDA"/>
                       </a:solidFill>
                     </a:lnB>
-                    <a:lnT w="9525" cap="flat" cmpd="sng" algn="ctr">
-                      <a:solidFill>
-                        <a:srgbClr val="DCE2E9"/>
-                      </a:solidFill>
-                    </a:lnT>
                     <a:solidFill>
                       <a:srgbClr val="F6F8FA"/>
                     </a:solidFill>
@@ -9959,26 +9979,26 @@
                     </a:p>
                   </a:txBody>
                   <a:tcPr marL="82296" marR="82296" marT="50292" marB="50292" anchor="ctr">
-                    <a:lnR w="9525" cap="flat" cmpd="sng" algn="ctr">
-                      <a:solidFill>
-                        <a:srgbClr val="F6F8FA"/>
+                    <a:lnL w="12700" cap="flat" cmpd="sng" algn="ctr">
+                      <a:solidFill>
+                        <a:srgbClr val="E3E8EE"/>
+                      </a:solidFill>
+                    </a:lnL>
+                    <a:lnR w="12700" cap="flat" cmpd="sng" algn="ctr">
+                      <a:solidFill>
+                        <a:srgbClr val="E3E8EE"/>
                       </a:solidFill>
                     </a:lnR>
-                    <a:lnL w="9525" cap="flat" cmpd="sng" algn="ctr">
-                      <a:solidFill>
-                        <a:srgbClr val="F6F8FA"/>
-                      </a:solidFill>
-                    </a:lnL>
-                    <a:lnB w="9525" cap="flat" cmpd="sng" algn="ctr">
-                      <a:solidFill>
-                        <a:srgbClr val="DCE2E9"/>
+                    <a:lnT w="12700" cap="flat" cmpd="sng" algn="ctr">
+                      <a:solidFill>
+                        <a:srgbClr val="C5CEDA"/>
+                      </a:solidFill>
+                    </a:lnT>
+                    <a:lnB w="15875" cap="flat" cmpd="sng" algn="ctr">
+                      <a:solidFill>
+                        <a:srgbClr val="C5CEDA"/>
                       </a:solidFill>
                     </a:lnB>
-                    <a:lnT w="9525" cap="flat" cmpd="sng" algn="ctr">
-                      <a:solidFill>
-                        <a:srgbClr val="DCE2E9"/>
-                      </a:solidFill>
-                    </a:lnT>
                     <a:solidFill>
                       <a:srgbClr val="F6F8FA"/>
                     </a:solidFill>
@@ -10006,26 +10026,26 @@
                     </a:p>
                   </a:txBody>
                   <a:tcPr marL="82296" marR="82296" marT="50292" marB="50292" anchor="ctr">
-                    <a:lnR w="9525" cap="flat" cmpd="sng" algn="ctr">
-                      <a:solidFill>
-                        <a:srgbClr val="F6F8FA"/>
+                    <a:lnL w="12700" cap="flat" cmpd="sng" algn="ctr">
+                      <a:solidFill>
+                        <a:srgbClr val="E3E8EE"/>
+                      </a:solidFill>
+                    </a:lnL>
+                    <a:lnR w="12700" cap="flat" cmpd="sng" algn="ctr">
+                      <a:solidFill>
+                        <a:srgbClr val="E3E8EE"/>
                       </a:solidFill>
                     </a:lnR>
-                    <a:lnL w="9525" cap="flat" cmpd="sng" algn="ctr">
-                      <a:solidFill>
-                        <a:srgbClr val="F6F8FA"/>
-                      </a:solidFill>
-                    </a:lnL>
-                    <a:lnB w="9525" cap="flat" cmpd="sng" algn="ctr">
-                      <a:solidFill>
-                        <a:srgbClr val="DCE2E9"/>
+                    <a:lnT w="12700" cap="flat" cmpd="sng" algn="ctr">
+                      <a:solidFill>
+                        <a:srgbClr val="C5CEDA"/>
+                      </a:solidFill>
+                    </a:lnT>
+                    <a:lnB w="15875" cap="flat" cmpd="sng" algn="ctr">
+                      <a:solidFill>
+                        <a:srgbClr val="C5CEDA"/>
                       </a:solidFill>
                     </a:lnB>
-                    <a:lnT w="9525" cap="flat" cmpd="sng" algn="ctr">
-                      <a:solidFill>
-                        <a:srgbClr val="DCE2E9"/>
-                      </a:solidFill>
-                    </a:lnT>
                     <a:solidFill>
                       <a:srgbClr val="F6F8FA"/>
                     </a:solidFill>
@@ -10053,26 +10073,26 @@
                     </a:p>
                   </a:txBody>
                   <a:tcPr marL="82296" marR="82296" marT="50292" marB="50292" anchor="ctr">
-                    <a:lnR w="9525" cap="flat" cmpd="sng" algn="ctr">
-                      <a:solidFill>
-                        <a:srgbClr val="F6F8FA"/>
+                    <a:lnL w="12700" cap="flat" cmpd="sng" algn="ctr">
+                      <a:solidFill>
+                        <a:srgbClr val="E3E8EE"/>
+                      </a:solidFill>
+                    </a:lnL>
+                    <a:lnR w="12700" cap="flat" cmpd="sng" algn="ctr">
+                      <a:solidFill>
+                        <a:srgbClr val="E3E8EE"/>
                       </a:solidFill>
                     </a:lnR>
-                    <a:lnL w="9525" cap="flat" cmpd="sng" algn="ctr">
-                      <a:solidFill>
-                        <a:srgbClr val="F6F8FA"/>
-                      </a:solidFill>
-                    </a:lnL>
-                    <a:lnB w="9525" cap="flat" cmpd="sng" algn="ctr">
-                      <a:solidFill>
-                        <a:srgbClr val="DCE2E9"/>
+                    <a:lnT w="12700" cap="flat" cmpd="sng" algn="ctr">
+                      <a:solidFill>
+                        <a:srgbClr val="C5CEDA"/>
+                      </a:solidFill>
+                    </a:lnT>
+                    <a:lnB w="15875" cap="flat" cmpd="sng" algn="ctr">
+                      <a:solidFill>
+                        <a:srgbClr val="C5CEDA"/>
                       </a:solidFill>
                     </a:lnB>
-                    <a:lnT w="9525" cap="flat" cmpd="sng" algn="ctr">
-                      <a:solidFill>
-                        <a:srgbClr val="DCE2E9"/>
-                      </a:solidFill>
-                    </a:lnT>
                     <a:solidFill>
                       <a:srgbClr val="F6F8FA"/>
                     </a:solidFill>
@@ -10100,26 +10120,26 @@
                     </a:p>
                   </a:txBody>
                   <a:tcPr marL="82296" marR="82296" marT="50292" marB="50292" anchor="ctr">
-                    <a:lnR w="9525" cap="flat" cmpd="sng" algn="ctr">
-                      <a:solidFill>
-                        <a:srgbClr val="F6F8FA"/>
+                    <a:lnL w="12700" cap="flat" cmpd="sng" algn="ctr">
+                      <a:solidFill>
+                        <a:srgbClr val="E3E8EE"/>
+                      </a:solidFill>
+                    </a:lnL>
+                    <a:lnR w="12700" cap="flat" cmpd="sng" algn="ctr">
+                      <a:solidFill>
+                        <a:srgbClr val="C5CEDA"/>
                       </a:solidFill>
                     </a:lnR>
-                    <a:lnL w="9525" cap="flat" cmpd="sng" algn="ctr">
-                      <a:solidFill>
-                        <a:srgbClr val="F6F8FA"/>
-                      </a:solidFill>
-                    </a:lnL>
-                    <a:lnB w="9525" cap="flat" cmpd="sng" algn="ctr">
-                      <a:solidFill>
-                        <a:srgbClr val="DCE2E9"/>
+                    <a:lnT w="12700" cap="flat" cmpd="sng" algn="ctr">
+                      <a:solidFill>
+                        <a:srgbClr val="C5CEDA"/>
+                      </a:solidFill>
+                    </a:lnT>
+                    <a:lnB w="15875" cap="flat" cmpd="sng" algn="ctr">
+                      <a:solidFill>
+                        <a:srgbClr val="C5CEDA"/>
                       </a:solidFill>
                     </a:lnB>
-                    <a:lnT w="9525" cap="flat" cmpd="sng" algn="ctr">
-                      <a:solidFill>
-                        <a:srgbClr val="DCE2E9"/>
-                      </a:solidFill>
-                    </a:lnT>
                     <a:solidFill>
                       <a:srgbClr val="F6F8FA"/>
                     </a:solidFill>
@@ -10143,15 +10163,15 @@
           </a:xfrm>
           <a:prstGeom prst="roundRect">
             <a:avLst>
-              <a:gd name="adj" fmla="val 8333"/>
+              <a:gd name="adj" fmla="val 9027"/>
             </a:avLst>
           </a:prstGeom>
           <a:solidFill>
-            <a:srgbClr val="F6F8FA"/>
+            <a:srgbClr val="232E3E"/>
           </a:solidFill>
-          <a:ln w="9525">
+          <a:ln w="15875">
             <a:solidFill>
-              <a:srgbClr val="DCE2E9"/>
+              <a:srgbClr val="4A5C75"/>
             </a:solidFill>
           </a:ln>
           <a:effectLst/>
@@ -10186,17 +10206,19 @@
         </p:nvSpPr>
         <p:spPr>
           <a:xfrm>
-            <a:off x="996696" y="5285232"/>
+            <a:off x="996696" y="5294376"/>
             <a:ext cx="530352" cy="530352"/>
           </a:xfrm>
           <a:prstGeom prst="ellipse">
             <a:avLst/>
           </a:prstGeom>
           <a:solidFill>
-            <a:srgbClr val="232E3E"/>
+            <a:srgbClr val="2B3849"/>
           </a:solidFill>
-          <a:ln>
-            <a:noFill/>
+          <a:ln w="12700">
+            <a:solidFill>
+              <a:srgbClr val="4A5C75"/>
+            </a:solidFill>
           </a:ln>
           <a:effectLst/>
         </p:spPr>
@@ -10238,8 +10260,8 @@
         </p:blipFill>
         <p:spPr>
           <a:xfrm>
-            <a:off x="1138428" y="5426964"/>
-            <a:ext cx="246888" cy="246888"/>
+            <a:off x="1129284" y="5426964"/>
+            <a:ext cx="265176" cy="265176"/>
           </a:xfrm>
           <a:prstGeom prst="rect">
             <a:avLst/>
@@ -10254,8 +10276,8 @@
         </p:nvSpPr>
         <p:spPr>
           <a:xfrm>
-            <a:off x="1673352" y="5157216"/>
-            <a:ext cx="9521921" cy="310896"/>
+            <a:off x="1691640" y="5157216"/>
+            <a:ext cx="9503633" cy="310896"/>
           </a:xfrm>
           <a:prstGeom prst="rect">
             <a:avLst/>
@@ -10272,7 +10294,7 @@
             <a:r>
               <a:rPr sz="1350" b="1" i="0">
                 <a:solidFill>
-                  <a:srgbClr val="232E3E"/>
+                  <a:srgbClr val="FFFFFF"/>
                 </a:solidFill>
                 <a:latin typeface="Calibri"/>
               </a:rPr>
@@ -10289,8 +10311,8 @@
         </p:nvSpPr>
         <p:spPr>
           <a:xfrm>
-            <a:off x="1673352" y="5522976"/>
-            <a:ext cx="9521921" cy="566928"/>
+            <a:off x="1691640" y="5522976"/>
+            <a:ext cx="9503633" cy="566928"/>
           </a:xfrm>
           <a:prstGeom prst="rect">
             <a:avLst/>
@@ -10311,7 +10333,7 @@
             <a:r>
               <a:rPr sz="1100" b="0" i="0">
                 <a:solidFill>
-                  <a:srgbClr val="55606E"/>
+                  <a:srgbClr val="AEB9C8"/>
                 </a:solidFill>
                 <a:latin typeface="Calibri"/>
               </a:rPr>
@@ -10721,8 +10743,8 @@
         </p:nvSpPr>
         <p:spPr>
           <a:xfrm>
-            <a:off x="4892040" y="3584448"/>
-            <a:ext cx="493776" cy="493776"/>
+            <a:off x="4892040" y="3511296"/>
+            <a:ext cx="603504" cy="603504"/>
           </a:xfrm>
           <a:prstGeom prst="ellipse">
             <a:avLst/>
@@ -10730,8 +10752,10 @@
           <a:solidFill>
             <a:srgbClr val="2B3849"/>
           </a:solidFill>
-          <a:ln>
-            <a:noFill/>
+          <a:ln w="12700">
+            <a:solidFill>
+              <a:srgbClr val="4A5C75"/>
+            </a:solidFill>
           </a:ln>
           <a:effectLst/>
         </p:spPr>
@@ -10773,8 +10797,8 @@
         </p:blipFill>
         <p:spPr>
           <a:xfrm>
-            <a:off x="5020055" y="3712463"/>
-            <a:ext cx="237744" cy="237744"/>
+            <a:off x="5042916" y="3662172"/>
+            <a:ext cx="301752" cy="301752"/>
           </a:xfrm>
           <a:prstGeom prst="rect">
             <a:avLst/>
@@ -10789,8 +10813,8 @@
         </p:nvSpPr>
         <p:spPr>
           <a:xfrm>
-            <a:off x="5614416" y="3593591"/>
-            <a:ext cx="5577840" cy="256032"/>
+            <a:off x="5760720" y="3502152"/>
+            <a:ext cx="5486400" cy="347472"/>
           </a:xfrm>
           <a:prstGeom prst="rect">
             <a:avLst/>
@@ -10805,7 +10829,7 @@
           <a:p>
             <a:pPr algn="l"/>
             <a:r>
-              <a:rPr sz="1500" b="1" i="0">
+              <a:rPr sz="2300" b="1" i="0">
                 <a:solidFill>
                   <a:srgbClr val="FFFFFF"/>
                 </a:solidFill>
@@ -10824,8 +10848,8 @@
         </p:nvSpPr>
         <p:spPr>
           <a:xfrm>
-            <a:off x="5614416" y="3858768"/>
-            <a:ext cx="5577840" cy="219456"/>
+            <a:off x="5760720" y="3867911"/>
+            <a:ext cx="5486400" cy="237744"/>
           </a:xfrm>
           <a:prstGeom prst="rect">
             <a:avLst/>
@@ -10840,7 +10864,7 @@
           <a:p>
             <a:pPr algn="l"/>
             <a:r>
-              <a:rPr sz="1100" b="0" i="0">
+              <a:rPr sz="1250" b="0" i="0">
                 <a:solidFill>
                   <a:srgbClr val="8792A3"/>
                 </a:solidFill>
@@ -10859,8 +10883,8 @@
         </p:nvSpPr>
         <p:spPr>
           <a:xfrm>
-            <a:off x="4892040" y="4334256"/>
-            <a:ext cx="493776" cy="493776"/>
+            <a:off x="4892040" y="4407408"/>
+            <a:ext cx="603504" cy="603504"/>
           </a:xfrm>
           <a:prstGeom prst="ellipse">
             <a:avLst/>
@@ -10868,8 +10892,10 @@
           <a:solidFill>
             <a:srgbClr val="2B3849"/>
           </a:solidFill>
-          <a:ln>
-            <a:noFill/>
+          <a:ln w="12700">
+            <a:solidFill>
+              <a:srgbClr val="4A5C75"/>
+            </a:solidFill>
           </a:ln>
           <a:effectLst/>
         </p:spPr>
@@ -10911,8 +10937,8 @@
         </p:blipFill>
         <p:spPr>
           <a:xfrm>
-            <a:off x="5020055" y="4462272"/>
-            <a:ext cx="237744" cy="237744"/>
+            <a:off x="5042916" y="4558284"/>
+            <a:ext cx="301752" cy="301752"/>
           </a:xfrm>
           <a:prstGeom prst="rect">
             <a:avLst/>
@@ -10927,8 +10953,8 @@
         </p:nvSpPr>
         <p:spPr>
           <a:xfrm>
-            <a:off x="5614416" y="4443984"/>
-            <a:ext cx="5577840" cy="274320"/>
+            <a:off x="5760720" y="4535424"/>
+            <a:ext cx="5486400" cy="347472"/>
           </a:xfrm>
           <a:prstGeom prst="rect">
             <a:avLst/>
@@ -10943,7 +10969,7 @@
           <a:p>
             <a:pPr algn="l"/>
             <a:r>
-              <a:rPr sz="1400" b="0" i="0">
+              <a:rPr sz="2000" b="0" i="0">
                 <a:solidFill>
                   <a:srgbClr val="FFFFFF"/>
                 </a:solidFill>
@@ -10962,8 +10988,8 @@
         </p:nvSpPr>
         <p:spPr>
           <a:xfrm>
-            <a:off x="4892040" y="5084064"/>
-            <a:ext cx="493776" cy="493776"/>
+            <a:off x="4892040" y="5303520"/>
+            <a:ext cx="603504" cy="603504"/>
           </a:xfrm>
           <a:prstGeom prst="ellipse">
             <a:avLst/>
@@ -10971,8 +10997,10 @@
           <a:solidFill>
             <a:srgbClr val="2B3849"/>
           </a:solidFill>
-          <a:ln>
-            <a:noFill/>
+          <a:ln w="12700">
+            <a:solidFill>
+              <a:srgbClr val="4A5C75"/>
+            </a:solidFill>
           </a:ln>
           <a:effectLst/>
         </p:spPr>
@@ -11014,8 +11042,8 @@
         </p:blipFill>
         <p:spPr>
           <a:xfrm>
-            <a:off x="5020055" y="5212080"/>
-            <a:ext cx="237744" cy="237744"/>
+            <a:off x="5042916" y="5454396"/>
+            <a:ext cx="301752" cy="301752"/>
           </a:xfrm>
           <a:prstGeom prst="rect">
             <a:avLst/>
@@ -11030,8 +11058,8 @@
         </p:nvSpPr>
         <p:spPr>
           <a:xfrm>
-            <a:off x="5614416" y="5193792"/>
-            <a:ext cx="5577840" cy="274320"/>
+            <a:off x="5760720" y="5431536"/>
+            <a:ext cx="5486400" cy="347472"/>
           </a:xfrm>
           <a:prstGeom prst="rect">
             <a:avLst/>
@@ -11046,7 +11074,7 @@
           <a:p>
             <a:pPr algn="l"/>
             <a:r>
-              <a:rPr sz="1400" b="0" i="0">
+              <a:rPr sz="2000" b="0" i="0">
                 <a:solidFill>
                   <a:srgbClr val="FFFFFF"/>
                 </a:solidFill>

--- a/clients/align-hcm/deliverables/2026-08-12-bosley-hairclub-ukg-pro-merger-proposal/Align_HCM_Bosley_HairClub_UKG_Pro_Merger.pptx
+++ b/clients/align-hcm/deliverables/2026-08-12-bosley-hairclub-ukg-pro-merger-proposal/Align_HCM_Bosley_HairClub_UKG_Pro_Merger.pptx
@@ -3346,7 +3346,7 @@
             <a:r>
               <a:rPr sz="2200" b="0" i="0">
                 <a:solidFill>
-                  <a:srgbClr val="AEB9C8"/>
+                  <a:srgbClr val="EDF2F8"/>
                 </a:solidFill>
                 <a:latin typeface="Calibri"/>
               </a:rPr>
@@ -3425,7 +3425,7 @@
             <a:r>
               <a:rPr sz="1300" b="1" i="0">
                 <a:solidFill>
-                  <a:srgbClr val="8792A3"/>
+                  <a:srgbClr val="C7D2DF"/>
                 </a:solidFill>
                 <a:latin typeface="Calibri"/>
               </a:rPr>
@@ -3460,7 +3460,7 @@
             <a:r>
               <a:rPr sz="950" b="0" i="0" spc="160">
                 <a:solidFill>
-                  <a:srgbClr val="8792A3"/>
+                  <a:srgbClr val="C7D2DF"/>
                 </a:solidFill>
                 <a:latin typeface="Calibri"/>
               </a:rPr>
@@ -3563,7 +3563,7 @@
             <a:r>
               <a:rPr sz="900" b="0" i="0">
                 <a:solidFill>
-                  <a:srgbClr val="8792A3"/>
+                  <a:srgbClr val="C7D2DF"/>
                 </a:solidFill>
                 <a:latin typeface="Calibri"/>
               </a:rPr>
@@ -3598,7 +3598,7 @@
             <a:r>
               <a:rPr sz="900" b="0" i="0">
                 <a:solidFill>
-                  <a:srgbClr val="8792A3"/>
+                  <a:srgbClr val="C7D2DF"/>
                 </a:solidFill>
                 <a:latin typeface="Calibri"/>
               </a:rPr>
@@ -3695,7 +3695,7 @@
             <a:r>
               <a:rPr sz="1050" b="1" i="0" spc="140">
                 <a:solidFill>
-                  <a:srgbClr val="E97722"/>
+                  <a:srgbClr val="B05512"/>
                 </a:solidFill>
                 <a:latin typeface="Calibri"/>
               </a:rPr>
@@ -3809,7 +3809,7 @@
             <a:r>
               <a:rPr sz="1300" b="0" i="0">
                 <a:solidFill>
-                  <a:srgbClr val="55606E"/>
+                  <a:srgbClr val="2B3849"/>
                 </a:solidFill>
                 <a:latin typeface="Calibri"/>
               </a:rPr>
@@ -4001,7 +4001,7 @@
             <a:r>
               <a:rPr sz="1100" b="0" i="0">
                 <a:solidFill>
-                  <a:srgbClr val="AEB9C8"/>
+                  <a:srgbClr val="EDF2F8"/>
                 </a:solidFill>
                 <a:latin typeface="Calibri"/>
               </a:rPr>
@@ -4193,7 +4193,7 @@
             <a:r>
               <a:rPr sz="1100" b="0" i="0">
                 <a:solidFill>
-                  <a:srgbClr val="AEB9C8"/>
+                  <a:srgbClr val="EDF2F8"/>
                 </a:solidFill>
                 <a:latin typeface="Calibri"/>
               </a:rPr>
@@ -4385,7 +4385,7 @@
             <a:r>
               <a:rPr sz="1100" b="0" i="0">
                 <a:solidFill>
-                  <a:srgbClr val="AEB9C8"/>
+                  <a:srgbClr val="EDF2F8"/>
                 </a:solidFill>
                 <a:latin typeface="Calibri"/>
               </a:rPr>
@@ -4577,7 +4577,7 @@
             <a:r>
               <a:rPr sz="1100" b="0" i="0">
                 <a:solidFill>
-                  <a:srgbClr val="AEB9C8"/>
+                  <a:srgbClr val="EDF2F8"/>
                 </a:solidFill>
                 <a:latin typeface="Calibri"/>
               </a:rPr>
@@ -4612,7 +4612,7 @@
             <a:r>
               <a:rPr sz="900" b="0" i="0">
                 <a:solidFill>
-                  <a:srgbClr val="8792A3"/>
+                  <a:srgbClr val="4A5563"/>
                 </a:solidFill>
                 <a:latin typeface="Calibri"/>
               </a:rPr>
@@ -4647,7 +4647,7 @@
             <a:r>
               <a:rPr sz="900" b="0" i="0">
                 <a:solidFill>
-                  <a:srgbClr val="8792A3"/>
+                  <a:srgbClr val="4A5563"/>
                 </a:solidFill>
                 <a:latin typeface="Calibri"/>
               </a:rPr>
@@ -4682,7 +4682,7 @@
             <a:r>
               <a:rPr sz="900" b="0" i="0">
                 <a:solidFill>
-                  <a:srgbClr val="8792A3"/>
+                  <a:srgbClr val="4A5563"/>
                 </a:solidFill>
                 <a:latin typeface="Calibri"/>
               </a:rPr>
@@ -4779,7 +4779,7 @@
             <a:r>
               <a:rPr sz="1050" b="1" i="0" spc="140">
                 <a:solidFill>
-                  <a:srgbClr val="E97722"/>
+                  <a:srgbClr val="B05512"/>
                 </a:solidFill>
                 <a:latin typeface="Calibri"/>
               </a:rPr>
@@ -4893,7 +4893,7 @@
             <a:r>
               <a:rPr sz="1300" b="0" i="0">
                 <a:solidFill>
-                  <a:srgbClr val="55606E"/>
+                  <a:srgbClr val="2B3849"/>
                 </a:solidFill>
                 <a:latin typeface="Calibri"/>
               </a:rPr>
@@ -5029,7 +5029,7 @@
             <a:r>
               <a:rPr sz="950" b="0" i="0">
                 <a:solidFill>
-                  <a:srgbClr val="AEB9C8"/>
+                  <a:srgbClr val="EDF2F8"/>
                 </a:solidFill>
                 <a:latin typeface="Calibri"/>
               </a:rPr>
@@ -5165,7 +5165,7 @@
             <a:r>
               <a:rPr sz="950" b="0" i="0">
                 <a:solidFill>
-                  <a:srgbClr val="AEB9C8"/>
+                  <a:srgbClr val="EDF2F8"/>
                 </a:solidFill>
                 <a:latin typeface="Calibri"/>
               </a:rPr>
@@ -5301,7 +5301,7 @@
             <a:r>
               <a:rPr sz="950" b="0" i="0">
                 <a:solidFill>
-                  <a:srgbClr val="AEB9C8"/>
+                  <a:srgbClr val="EDF2F8"/>
                 </a:solidFill>
                 <a:latin typeface="Calibri"/>
               </a:rPr>
@@ -5437,7 +5437,7 @@
             <a:r>
               <a:rPr sz="950" b="0" i="0">
                 <a:solidFill>
-                  <a:srgbClr val="AEB9C8"/>
+                  <a:srgbClr val="EDF2F8"/>
                 </a:solidFill>
                 <a:latin typeface="Calibri"/>
               </a:rPr>
@@ -5573,7 +5573,7 @@
             <a:r>
               <a:rPr sz="950" b="0" i="0">
                 <a:solidFill>
-                  <a:srgbClr val="AEB9C8"/>
+                  <a:srgbClr val="EDF2F8"/>
                 </a:solidFill>
                 <a:latin typeface="Calibri"/>
               </a:rPr>
@@ -5709,7 +5709,7 @@
             <a:r>
               <a:rPr sz="950" b="0" i="0">
                 <a:solidFill>
-                  <a:srgbClr val="AEB9C8"/>
+                  <a:srgbClr val="EDF2F8"/>
                 </a:solidFill>
                 <a:latin typeface="Calibri"/>
               </a:rPr>
@@ -5792,7 +5792,7 @@
             <a:r>
               <a:rPr sz="950" b="1" i="0">
                 <a:solidFill>
-                  <a:srgbClr val="E97722"/>
+                  <a:srgbClr val="B05512"/>
                 </a:solidFill>
                 <a:latin typeface="Calibri"/>
               </a:rPr>
@@ -5808,7 +5808,7 @@
             <a:r>
               <a:rPr sz="950" b="1" i="0">
                 <a:solidFill>
-                  <a:srgbClr val="E97722"/>
+                  <a:srgbClr val="B05512"/>
                 </a:solidFill>
                 <a:latin typeface="Calibri"/>
               </a:rPr>
@@ -5843,7 +5843,7 @@
             <a:r>
               <a:rPr sz="1000" b="0" i="1">
                 <a:solidFill>
-                  <a:srgbClr val="55606E"/>
+                  <a:srgbClr val="2B3849"/>
                 </a:solidFill>
                 <a:latin typeface="Calibri"/>
               </a:rPr>
@@ -5878,7 +5878,7 @@
             <a:r>
               <a:rPr sz="1000" b="0" i="1">
                 <a:solidFill>
-                  <a:srgbClr val="55606E"/>
+                  <a:srgbClr val="2B3849"/>
                 </a:solidFill>
                 <a:latin typeface="Calibri"/>
               </a:rPr>
@@ -6035,7 +6035,7 @@
             <a:r>
               <a:rPr sz="1150" b="0" i="0">
                 <a:solidFill>
-                  <a:srgbClr val="AEB9C8"/>
+                  <a:srgbClr val="EDF2F8"/>
                 </a:solidFill>
                 <a:latin typeface="Calibri"/>
               </a:rPr>
@@ -6070,7 +6070,7 @@
             <a:r>
               <a:rPr sz="900" b="0" i="0">
                 <a:solidFill>
-                  <a:srgbClr val="8792A3"/>
+                  <a:srgbClr val="4A5563"/>
                 </a:solidFill>
                 <a:latin typeface="Calibri"/>
               </a:rPr>
@@ -6105,7 +6105,7 @@
             <a:r>
               <a:rPr sz="900" b="0" i="0">
                 <a:solidFill>
-                  <a:srgbClr val="8792A3"/>
+                  <a:srgbClr val="4A5563"/>
                 </a:solidFill>
                 <a:latin typeface="Calibri"/>
               </a:rPr>
@@ -6140,7 +6140,7 @@
             <a:r>
               <a:rPr sz="900" b="0" i="0">
                 <a:solidFill>
-                  <a:srgbClr val="8792A3"/>
+                  <a:srgbClr val="4A5563"/>
                 </a:solidFill>
                 <a:latin typeface="Calibri"/>
               </a:rPr>
@@ -6237,7 +6237,7 @@
             <a:r>
               <a:rPr sz="1050" b="1" i="0" spc="140">
                 <a:solidFill>
-                  <a:srgbClr val="E97722"/>
+                  <a:srgbClr val="B05512"/>
                 </a:solidFill>
                 <a:latin typeface="Calibri"/>
               </a:rPr>
@@ -6351,7 +6351,7 @@
             <a:r>
               <a:rPr sz="1300" b="0" i="0">
                 <a:solidFill>
-                  <a:srgbClr val="55606E"/>
+                  <a:srgbClr val="2B3849"/>
                 </a:solidFill>
                 <a:latin typeface="Calibri"/>
               </a:rPr>
@@ -6585,7 +6585,7 @@
                       <a:r>
                         <a:rPr sz="1000" b="1" i="0">
                           <a:solidFill>
-                            <a:srgbClr val="E97722"/>
+                            <a:srgbClr val="B05512"/>
                           </a:solidFill>
                           <a:latin typeface="Calibri"/>
                         </a:rPr>
@@ -6632,7 +6632,7 @@
                       <a:r>
                         <a:rPr sz="1000" b="0" i="0">
                           <a:solidFill>
-                            <a:srgbClr val="55606E"/>
+                            <a:srgbClr val="2B3849"/>
                           </a:solidFill>
                           <a:latin typeface="Calibri"/>
                         </a:rPr>
@@ -6728,7 +6728,7 @@
                       <a:r>
                         <a:rPr sz="1000" b="1" i="0">
                           <a:solidFill>
-                            <a:srgbClr val="E97722"/>
+                            <a:srgbClr val="B05512"/>
                           </a:solidFill>
                           <a:latin typeface="Calibri"/>
                         </a:rPr>
@@ -6775,7 +6775,7 @@
                       <a:r>
                         <a:rPr sz="1000" b="0" i="0">
                           <a:solidFill>
-                            <a:srgbClr val="55606E"/>
+                            <a:srgbClr val="2B3849"/>
                           </a:solidFill>
                           <a:latin typeface="Calibri"/>
                         </a:rPr>
@@ -6871,7 +6871,7 @@
                       <a:r>
                         <a:rPr sz="1000" b="1" i="0">
                           <a:solidFill>
-                            <a:srgbClr val="E97722"/>
+                            <a:srgbClr val="B05512"/>
                           </a:solidFill>
                           <a:latin typeface="Calibri"/>
                         </a:rPr>
@@ -6918,7 +6918,7 @@
                       <a:r>
                         <a:rPr sz="1000" b="0" i="0">
                           <a:solidFill>
-                            <a:srgbClr val="55606E"/>
+                            <a:srgbClr val="2B3849"/>
                           </a:solidFill>
                           <a:latin typeface="Calibri"/>
                         </a:rPr>
@@ -7014,7 +7014,7 @@
                       <a:r>
                         <a:rPr sz="1000" b="1" i="0">
                           <a:solidFill>
-                            <a:srgbClr val="E97722"/>
+                            <a:srgbClr val="B05512"/>
                           </a:solidFill>
                           <a:latin typeface="Calibri"/>
                         </a:rPr>
@@ -7061,7 +7061,7 @@
                       <a:r>
                         <a:rPr sz="1000" b="0" i="0">
                           <a:solidFill>
-                            <a:srgbClr val="55606E"/>
+                            <a:srgbClr val="2B3849"/>
                           </a:solidFill>
                           <a:latin typeface="Calibri"/>
                         </a:rPr>
@@ -7157,7 +7157,7 @@
                       <a:r>
                         <a:rPr sz="1000" b="1" i="0">
                           <a:solidFill>
-                            <a:srgbClr val="E97722"/>
+                            <a:srgbClr val="B05512"/>
                           </a:solidFill>
                           <a:latin typeface="Calibri"/>
                         </a:rPr>
@@ -7204,7 +7204,7 @@
                       <a:r>
                         <a:rPr sz="1000" b="0" i="0">
                           <a:solidFill>
-                            <a:srgbClr val="55606E"/>
+                            <a:srgbClr val="2B3849"/>
                           </a:solidFill>
                           <a:latin typeface="Calibri"/>
                         </a:rPr>
@@ -7300,7 +7300,7 @@
                       <a:r>
                         <a:rPr sz="1000" b="1" i="0">
                           <a:solidFill>
-                            <a:srgbClr val="E97722"/>
+                            <a:srgbClr val="B05512"/>
                           </a:solidFill>
                           <a:latin typeface="Calibri"/>
                         </a:rPr>
@@ -7347,7 +7347,7 @@
                       <a:r>
                         <a:rPr sz="1000" b="0" i="0">
                           <a:solidFill>
-                            <a:srgbClr val="55606E"/>
+                            <a:srgbClr val="2B3849"/>
                           </a:solidFill>
                           <a:latin typeface="Calibri"/>
                         </a:rPr>
@@ -7443,7 +7443,7 @@
                       <a:r>
                         <a:rPr sz="1000" b="1" i="0">
                           <a:solidFill>
-                            <a:srgbClr val="E97722"/>
+                            <a:srgbClr val="B05512"/>
                           </a:solidFill>
                           <a:latin typeface="Calibri"/>
                         </a:rPr>
@@ -7490,7 +7490,7 @@
                       <a:r>
                         <a:rPr sz="1000" b="0" i="0">
                           <a:solidFill>
-                            <a:srgbClr val="55606E"/>
+                            <a:srgbClr val="2B3849"/>
                           </a:solidFill>
                           <a:latin typeface="Calibri"/>
                         </a:rPr>
@@ -7555,7 +7555,7 @@
             <a:r>
               <a:rPr sz="900" b="0" i="0">
                 <a:solidFill>
-                  <a:srgbClr val="8792A3"/>
+                  <a:srgbClr val="4A5563"/>
                 </a:solidFill>
                 <a:latin typeface="Calibri"/>
               </a:rPr>
@@ -7590,7 +7590,7 @@
             <a:r>
               <a:rPr sz="900" b="0" i="0">
                 <a:solidFill>
-                  <a:srgbClr val="8792A3"/>
+                  <a:srgbClr val="4A5563"/>
                 </a:solidFill>
                 <a:latin typeface="Calibri"/>
               </a:rPr>
@@ -7625,7 +7625,7 @@
             <a:r>
               <a:rPr sz="900" b="0" i="0">
                 <a:solidFill>
-                  <a:srgbClr val="8792A3"/>
+                  <a:srgbClr val="4A5563"/>
                 </a:solidFill>
                 <a:latin typeface="Calibri"/>
               </a:rPr>
@@ -7836,7 +7836,7 @@
             <a:r>
               <a:rPr sz="1300" b="0" i="0">
                 <a:solidFill>
-                  <a:srgbClr val="AEB9C8"/>
+                  <a:srgbClr val="EDF2F8"/>
                 </a:solidFill>
                 <a:latin typeface="Calibri"/>
               </a:rPr>
@@ -7993,7 +7993,7 @@
             <a:r>
               <a:rPr sz="1000" b="0" i="0">
                 <a:solidFill>
-                  <a:srgbClr val="AEB9C8"/>
+                  <a:srgbClr val="EDF2F8"/>
                 </a:solidFill>
                 <a:latin typeface="Calibri"/>
               </a:rPr>
@@ -8185,7 +8185,7 @@
             <a:r>
               <a:rPr sz="1100" b="0" i="0">
                 <a:solidFill>
-                  <a:srgbClr val="AEB9C8"/>
+                  <a:srgbClr val="EDF2F8"/>
                 </a:solidFill>
                 <a:latin typeface="Calibri"/>
               </a:rPr>
@@ -8377,7 +8377,7 @@
             <a:r>
               <a:rPr sz="1100" b="0" i="0">
                 <a:solidFill>
-                  <a:srgbClr val="AEB9C8"/>
+                  <a:srgbClr val="EDF2F8"/>
                 </a:solidFill>
                 <a:latin typeface="Calibri"/>
               </a:rPr>
@@ -8412,7 +8412,7 @@
             <a:r>
               <a:rPr sz="900" b="0" i="0">
                 <a:solidFill>
-                  <a:srgbClr val="8792A3"/>
+                  <a:srgbClr val="C7D2DF"/>
                 </a:solidFill>
                 <a:latin typeface="Calibri"/>
               </a:rPr>
@@ -8447,7 +8447,7 @@
             <a:r>
               <a:rPr sz="900" b="0" i="0">
                 <a:solidFill>
-                  <a:srgbClr val="8792A3"/>
+                  <a:srgbClr val="C7D2DF"/>
                 </a:solidFill>
                 <a:latin typeface="Calibri"/>
               </a:rPr>
@@ -8482,7 +8482,7 @@
             <a:r>
               <a:rPr sz="900" b="0" i="0">
                 <a:solidFill>
-                  <a:srgbClr val="8792A3"/>
+                  <a:srgbClr val="C7D2DF"/>
                 </a:solidFill>
                 <a:latin typeface="Calibri"/>
               </a:rPr>
@@ -8579,7 +8579,7 @@
             <a:r>
               <a:rPr sz="1050" b="1" i="0" spc="140">
                 <a:solidFill>
-                  <a:srgbClr val="E97722"/>
+                  <a:srgbClr val="B05512"/>
                 </a:solidFill>
                 <a:latin typeface="Calibri"/>
               </a:rPr>
@@ -8693,7 +8693,7 @@
             <a:r>
               <a:rPr sz="1300" b="0" i="0">
                 <a:solidFill>
-                  <a:srgbClr val="55606E"/>
+                  <a:srgbClr val="2B3849"/>
                 </a:solidFill>
                 <a:latin typeface="Calibri"/>
               </a:rPr>
@@ -9071,7 +9071,7 @@
                       <a:r>
                         <a:rPr sz="1050" b="1" i="0">
                           <a:solidFill>
-                            <a:srgbClr val="E97722"/>
+                            <a:srgbClr val="B05512"/>
                           </a:solidFill>
                           <a:latin typeface="Calibri"/>
                         </a:rPr>
@@ -9118,7 +9118,7 @@
                       <a:r>
                         <a:rPr sz="1050" b="1" i="0">
                           <a:solidFill>
-                            <a:srgbClr val="E97722"/>
+                            <a:srgbClr val="B05512"/>
                           </a:solidFill>
                           <a:latin typeface="Calibri"/>
                         </a:rPr>
@@ -9165,7 +9165,7 @@
                       <a:r>
                         <a:rPr sz="1050" b="1" i="0">
                           <a:solidFill>
-                            <a:srgbClr val="E97722"/>
+                            <a:srgbClr val="B05512"/>
                           </a:solidFill>
                           <a:latin typeface="Calibri"/>
                         </a:rPr>
@@ -9212,7 +9212,7 @@
                       <a:r>
                         <a:rPr sz="1050" b="1" i="0">
                           <a:solidFill>
-                            <a:srgbClr val="E97722"/>
+                            <a:srgbClr val="B05512"/>
                           </a:solidFill>
                           <a:latin typeface="Calibri"/>
                         </a:rPr>
@@ -9259,7 +9259,7 @@
                       <a:r>
                         <a:rPr sz="1050" b="1" i="0">
                           <a:solidFill>
-                            <a:srgbClr val="55606E"/>
+                            <a:srgbClr val="2B3849"/>
                           </a:solidFill>
                           <a:latin typeface="Calibri"/>
                         </a:rPr>
@@ -9355,7 +9355,7 @@
                       <a:r>
                         <a:rPr sz="1050" b="1" i="0">
                           <a:solidFill>
-                            <a:srgbClr val="55606E"/>
+                            <a:srgbClr val="2B3849"/>
                           </a:solidFill>
                           <a:latin typeface="Calibri"/>
                         </a:rPr>
@@ -9402,7 +9402,7 @@
                       <a:r>
                         <a:rPr sz="1050" b="1" i="0">
                           <a:solidFill>
-                            <a:srgbClr val="C0521A"/>
+                            <a:srgbClr val="94480F"/>
                           </a:solidFill>
                           <a:latin typeface="Calibri"/>
                         </a:rPr>
@@ -9449,7 +9449,7 @@
                       <a:r>
                         <a:rPr sz="1050" b="1" i="0">
                           <a:solidFill>
-                            <a:srgbClr val="E97722"/>
+                            <a:srgbClr val="B05512"/>
                           </a:solidFill>
                           <a:latin typeface="Calibri"/>
                         </a:rPr>
@@ -9496,7 +9496,7 @@
                       <a:r>
                         <a:rPr sz="1050" b="1" i="0">
                           <a:solidFill>
-                            <a:srgbClr val="C0521A"/>
+                            <a:srgbClr val="94480F"/>
                           </a:solidFill>
                           <a:latin typeface="Calibri"/>
                         </a:rPr>
@@ -9543,7 +9543,7 @@
                       <a:r>
                         <a:rPr sz="1050" b="1" i="0">
                           <a:solidFill>
-                            <a:srgbClr val="E97722"/>
+                            <a:srgbClr val="B05512"/>
                           </a:solidFill>
                           <a:latin typeface="Calibri"/>
                         </a:rPr>
@@ -9639,7 +9639,7 @@
                       <a:r>
                         <a:rPr sz="1050" b="1" i="0">
                           <a:solidFill>
-                            <a:srgbClr val="55606E"/>
+                            <a:srgbClr val="2B3849"/>
                           </a:solidFill>
                           <a:latin typeface="Calibri"/>
                         </a:rPr>
@@ -9686,7 +9686,7 @@
                       <a:r>
                         <a:rPr sz="1050" b="1" i="0">
                           <a:solidFill>
-                            <a:srgbClr val="E97722"/>
+                            <a:srgbClr val="B05512"/>
                           </a:solidFill>
                           <a:latin typeface="Calibri"/>
                         </a:rPr>
@@ -9733,7 +9733,7 @@
                       <a:r>
                         <a:rPr sz="1050" b="1" i="0">
                           <a:solidFill>
-                            <a:srgbClr val="C0521A"/>
+                            <a:srgbClr val="94480F"/>
                           </a:solidFill>
                           <a:latin typeface="Calibri"/>
                         </a:rPr>
@@ -9780,7 +9780,7 @@
                       <a:r>
                         <a:rPr sz="1050" b="1" i="0">
                           <a:solidFill>
-                            <a:srgbClr val="E97722"/>
+                            <a:srgbClr val="B05512"/>
                           </a:solidFill>
                           <a:latin typeface="Calibri"/>
                         </a:rPr>
@@ -9827,7 +9827,7 @@
                       <a:r>
                         <a:rPr sz="1050" b="1" i="0">
                           <a:solidFill>
-                            <a:srgbClr val="E97722"/>
+                            <a:srgbClr val="B05512"/>
                           </a:solidFill>
                           <a:latin typeface="Calibri"/>
                         </a:rPr>
@@ -9923,7 +9923,7 @@
                       <a:r>
                         <a:rPr sz="1050" b="1" i="0">
                           <a:solidFill>
-                            <a:srgbClr val="55606E"/>
+                            <a:srgbClr val="2B3849"/>
                           </a:solidFill>
                           <a:latin typeface="Calibri"/>
                         </a:rPr>
@@ -9970,7 +9970,7 @@
                       <a:r>
                         <a:rPr sz="1050" b="1" i="0">
                           <a:solidFill>
-                            <a:srgbClr val="55606E"/>
+                            <a:srgbClr val="2B3849"/>
                           </a:solidFill>
                           <a:latin typeface="Calibri"/>
                         </a:rPr>
@@ -10017,7 +10017,7 @@
                       <a:r>
                         <a:rPr sz="1050" b="1" i="0">
                           <a:solidFill>
-                            <a:srgbClr val="C0521A"/>
+                            <a:srgbClr val="94480F"/>
                           </a:solidFill>
                           <a:latin typeface="Calibri"/>
                         </a:rPr>
@@ -10064,7 +10064,7 @@
                       <a:r>
                         <a:rPr sz="1050" b="1" i="0">
                           <a:solidFill>
-                            <a:srgbClr val="55606E"/>
+                            <a:srgbClr val="2B3849"/>
                           </a:solidFill>
                           <a:latin typeface="Calibri"/>
                         </a:rPr>
@@ -10111,7 +10111,7 @@
                       <a:r>
                         <a:rPr sz="1050" b="1" i="0">
                           <a:solidFill>
-                            <a:srgbClr val="55606E"/>
+                            <a:srgbClr val="2B3849"/>
                           </a:solidFill>
                           <a:latin typeface="Calibri"/>
                         </a:rPr>
@@ -10333,7 +10333,7 @@
             <a:r>
               <a:rPr sz="1100" b="0" i="0">
                 <a:solidFill>
-                  <a:srgbClr val="AEB9C8"/>
+                  <a:srgbClr val="EDF2F8"/>
                 </a:solidFill>
                 <a:latin typeface="Calibri"/>
               </a:rPr>
@@ -10368,7 +10368,7 @@
             <a:r>
               <a:rPr sz="900" b="0" i="0">
                 <a:solidFill>
-                  <a:srgbClr val="8792A3"/>
+                  <a:srgbClr val="4A5563"/>
                 </a:solidFill>
                 <a:latin typeface="Calibri"/>
               </a:rPr>
@@ -10403,7 +10403,7 @@
             <a:r>
               <a:rPr sz="900" b="0" i="0">
                 <a:solidFill>
-                  <a:srgbClr val="8792A3"/>
+                  <a:srgbClr val="4A5563"/>
                 </a:solidFill>
                 <a:latin typeface="Calibri"/>
               </a:rPr>
@@ -10438,7 +10438,7 @@
             <a:r>
               <a:rPr sz="900" b="0" i="0">
                 <a:solidFill>
-                  <a:srgbClr val="8792A3"/>
+                  <a:srgbClr val="4A5563"/>
                 </a:solidFill>
                 <a:latin typeface="Calibri"/>
               </a:rPr>
@@ -10866,7 +10866,7 @@
             <a:r>
               <a:rPr sz="1250" b="0" i="0">
                 <a:solidFill>
-                  <a:srgbClr val="8792A3"/>
+                  <a:srgbClr val="C7D2DF"/>
                 </a:solidFill>
                 <a:latin typeface="Calibri"/>
               </a:rPr>
@@ -11111,7 +11111,7 @@
             <a:r>
               <a:rPr sz="900" b="0" i="0">
                 <a:solidFill>
-                  <a:srgbClr val="8792A3"/>
+                  <a:srgbClr val="C7D2DF"/>
                 </a:solidFill>
                 <a:latin typeface="Calibri"/>
               </a:rPr>
@@ -11146,7 +11146,7 @@
             <a:r>
               <a:rPr sz="900" b="0" i="0">
                 <a:solidFill>
-                  <a:srgbClr val="8792A3"/>
+                  <a:srgbClr val="C7D2DF"/>
                 </a:solidFill>
                 <a:latin typeface="Calibri"/>
               </a:rPr>
